--- a/Presentation/Auto Focus Network.pptx
+++ b/Presentation/Auto Focus Network.pptx
@@ -8452,19 +8452,178 @@
         <a:lstStyle/>
         <a:p>
           <a:r>
+            <a:rPr lang="en-US"/>
+            <a:t>Top Z position A647</a:t>
+          </a:r>
+          <a:endParaRPr lang="en-US" dirty="0"/>
+        </a:p>
+      </dgm:t>
+    </dgm:pt>
+    <dgm:pt modelId="{2E4F8C34-6D0B-473E-8F20-FB332B780822}" type="parTrans" cxnId="{F1BEF9F9-3A8B-4E85-A067-9F2631B7213F}">
+      <dgm:prSet/>
+      <dgm:spPr/>
+      <dgm:t>
+        <a:bodyPr/>
+        <a:lstStyle/>
+        <a:p>
+          <a:endParaRPr lang="en-US"/>
+        </a:p>
+      </dgm:t>
+    </dgm:pt>
+    <dgm:pt modelId="{8665254A-79ED-4C61-BE91-A8DBE5DEB98C}" type="sibTrans" cxnId="{F1BEF9F9-3A8B-4E85-A067-9F2631B7213F}">
+      <dgm:prSet/>
+      <dgm:spPr/>
+      <dgm:t>
+        <a:bodyPr/>
+        <a:lstStyle/>
+        <a:p>
+          <a:endParaRPr lang="en-US"/>
+        </a:p>
+      </dgm:t>
+    </dgm:pt>
+    <dgm:pt modelId="{5688624E-314A-43A9-9E5F-69EBD853F1ED}">
+      <dgm:prSet/>
+      <dgm:spPr/>
+      <dgm:t>
+        <a:bodyPr/>
+        <a:lstStyle/>
+        <a:p>
+          <a:r>
+            <a:rPr lang="en-US" dirty="0"/>
+            <a:t>12</a:t>
+          </a:r>
+        </a:p>
+      </dgm:t>
+    </dgm:pt>
+    <dgm:pt modelId="{E00C8D54-BE95-45E3-8E05-55442F30C1FD}" type="parTrans" cxnId="{BF87B50E-6723-4F55-BEF0-595A5C605226}">
+      <dgm:prSet/>
+      <dgm:spPr/>
+      <dgm:t>
+        <a:bodyPr/>
+        <a:lstStyle/>
+        <a:p>
+          <a:endParaRPr lang="en-US"/>
+        </a:p>
+      </dgm:t>
+    </dgm:pt>
+    <dgm:pt modelId="{E30F4295-8BE6-4AC5-8BA1-1CECD5B64619}" type="sibTrans" cxnId="{BF87B50E-6723-4F55-BEF0-595A5C605226}">
+      <dgm:prSet/>
+      <dgm:spPr/>
+      <dgm:t>
+        <a:bodyPr/>
+        <a:lstStyle/>
+        <a:p>
+          <a:endParaRPr lang="en-US"/>
+        </a:p>
+      </dgm:t>
+    </dgm:pt>
+    <dgm:pt modelId="{D62B1B85-31BA-4EE1-A240-AA5907A9BE05}">
+      <dgm:prSet/>
+      <dgm:spPr/>
+      <dgm:t>
+        <a:bodyPr/>
+        <a:lstStyle/>
+        <a:p>
+          <a:r>
+            <a:rPr lang="en-US" dirty="0"/>
+            <a:t>Number Z slices A647 with depth of focus step sizes</a:t>
+          </a:r>
+        </a:p>
+      </dgm:t>
+    </dgm:pt>
+    <dgm:pt modelId="{F8B11A85-4C27-4418-92C4-2864EE39D0AD}" type="parTrans" cxnId="{B2230D1D-E4AB-49D0-A18E-F45F6991EDD3}">
+      <dgm:prSet/>
+      <dgm:spPr/>
+      <dgm:t>
+        <a:bodyPr/>
+        <a:lstStyle/>
+        <a:p>
+          <a:endParaRPr lang="en-US"/>
+        </a:p>
+      </dgm:t>
+    </dgm:pt>
+    <dgm:pt modelId="{48FC96C0-8F65-468E-9C91-97CA1E1DD297}" type="sibTrans" cxnId="{B2230D1D-E4AB-49D0-A18E-F45F6991EDD3}">
+      <dgm:prSet/>
+      <dgm:spPr/>
+      <dgm:t>
+        <a:bodyPr/>
+        <a:lstStyle/>
+        <a:p>
+          <a:endParaRPr lang="en-US"/>
+        </a:p>
+      </dgm:t>
+    </dgm:pt>
+    <dgm:pt modelId="{8C990D31-B23E-4C1C-B104-C3D2430CF29C}">
+      <dgm:prSet phldrT="[Text]"/>
+      <dgm:spPr/>
+      <dgm:t>
+        <a:bodyPr/>
+        <a:lstStyle/>
+        <a:p>
+          <a:r>
             <a:rPr lang="en-US" dirty="0"/>
             <a:t>If tissue is present = 1, if tissue is absent = 0 </a:t>
           </a:r>
         </a:p>
       </dgm:t>
     </dgm:pt>
-    <dgm:pt modelId="{2E4F8C34-6D0B-473E-8F20-FB332B780822}" type="parTrans" cxnId="{F1BEF9F9-3A8B-4E85-A067-9F2631B7213F}">
+    <dgm:pt modelId="{950D44B6-6AC6-49C3-9B9F-7C0A25F57936}" type="parTrans" cxnId="{E3548FF9-E41C-4346-809B-796832BB7166}">
       <dgm:prSet/>
       <dgm:spPr/>
-    </dgm:pt>
-    <dgm:pt modelId="{8665254A-79ED-4C61-BE91-A8DBE5DEB98C}" type="sibTrans" cxnId="{F1BEF9F9-3A8B-4E85-A067-9F2631B7213F}">
+      <dgm:t>
+        <a:bodyPr/>
+        <a:lstStyle/>
+        <a:p>
+          <a:endParaRPr lang="en-US"/>
+        </a:p>
+      </dgm:t>
+    </dgm:pt>
+    <dgm:pt modelId="{42FF957D-C254-4DD6-A6AB-46816857525C}" type="sibTrans" cxnId="{E3548FF9-E41C-4346-809B-796832BB7166}">
       <dgm:prSet/>
       <dgm:spPr/>
+      <dgm:t>
+        <a:bodyPr/>
+        <a:lstStyle/>
+        <a:p>
+          <a:endParaRPr lang="en-US"/>
+        </a:p>
+      </dgm:t>
+    </dgm:pt>
+    <dgm:pt modelId="{93C5C6EE-232C-403A-8B36-B7247671CDED}">
+      <dgm:prSet/>
+      <dgm:spPr/>
+      <dgm:t>
+        <a:bodyPr/>
+        <a:lstStyle/>
+        <a:p>
+          <a:r>
+            <a:rPr lang="en-US" dirty="0"/>
+            <a:t>11</a:t>
+          </a:r>
+        </a:p>
+      </dgm:t>
+    </dgm:pt>
+    <dgm:pt modelId="{9CFC9A54-5D6E-42AC-BCD6-EED4D6905AD6}" type="parTrans" cxnId="{FBAF89BB-E854-4D7D-ACDE-A0197FE0804C}">
+      <dgm:prSet/>
+      <dgm:spPr/>
+      <dgm:t>
+        <a:bodyPr/>
+        <a:lstStyle/>
+        <a:p>
+          <a:endParaRPr lang="en-US"/>
+        </a:p>
+      </dgm:t>
+    </dgm:pt>
+    <dgm:pt modelId="{7F38D61E-E8FD-47DB-A30F-798D40691C51}" type="sibTrans" cxnId="{FBAF89BB-E854-4D7D-ACDE-A0197FE0804C}">
+      <dgm:prSet/>
+      <dgm:spPr/>
+      <dgm:t>
+        <a:bodyPr/>
+        <a:lstStyle/>
+        <a:p>
+          <a:endParaRPr lang="en-US"/>
+        </a:p>
+      </dgm:t>
     </dgm:pt>
     <dgm:pt modelId="{68768F37-E8AF-4175-AE5A-4F35AF491F27}" type="pres">
       <dgm:prSet presAssocID="{E3810C7A-162E-4F59-A5CC-D6E55AA7937F}" presName="Name0" presStyleCnt="0">
@@ -8476,12 +8635,12 @@
       </dgm:prSet>
       <dgm:spPr/>
     </dgm:pt>
-    <dgm:pt modelId="{4AD4B38E-16EB-4DE7-8482-A393A442B025}" type="pres">
-      <dgm:prSet presAssocID="{91FE08E5-D0B0-4A32-AD9B-5986F438BA14}" presName="linNode" presStyleCnt="0"/>
-      <dgm:spPr/>
-    </dgm:pt>
-    <dgm:pt modelId="{F12FCF34-9E88-4F3C-B75C-BD6AE8E40F6E}" type="pres">
-      <dgm:prSet presAssocID="{91FE08E5-D0B0-4A32-AD9B-5986F438BA14}" presName="parentText" presStyleLbl="node1" presStyleIdx="0" presStyleCnt="11">
+    <dgm:pt modelId="{5B98B960-2D3F-4127-A3AE-2A95F3F98B16}" type="pres">
+      <dgm:prSet presAssocID="{5688624E-314A-43A9-9E5F-69EBD853F1ED}" presName="linNode" presStyleCnt="0"/>
+      <dgm:spPr/>
+    </dgm:pt>
+    <dgm:pt modelId="{A74D09D0-1FCF-4852-A728-49E12CF054FF}" type="pres">
+      <dgm:prSet presAssocID="{5688624E-314A-43A9-9E5F-69EBD853F1ED}" presName="parentText" presStyleLbl="node1" presStyleIdx="0" presStyleCnt="13">
         <dgm:presLayoutVars>
           <dgm:chMax val="1"/>
           <dgm:bulletEnabled val="1"/>
@@ -8489,24 +8648,24 @@
       </dgm:prSet>
       <dgm:spPr/>
     </dgm:pt>
-    <dgm:pt modelId="{252247C1-1B56-4D8C-87FB-B27098B6AD39}" type="pres">
-      <dgm:prSet presAssocID="{91FE08E5-D0B0-4A32-AD9B-5986F438BA14}" presName="descendantText" presStyleLbl="alignAccFollowNode1" presStyleIdx="0" presStyleCnt="11">
+    <dgm:pt modelId="{9C0069D4-725E-4494-8846-60EDD57DC479}" type="pres">
+      <dgm:prSet presAssocID="{5688624E-314A-43A9-9E5F-69EBD853F1ED}" presName="descendantText" presStyleLbl="alignAccFollowNode1" presStyleIdx="0" presStyleCnt="13">
         <dgm:presLayoutVars>
           <dgm:bulletEnabled val="1"/>
         </dgm:presLayoutVars>
       </dgm:prSet>
       <dgm:spPr/>
     </dgm:pt>
-    <dgm:pt modelId="{C368BBDB-D78D-47D2-A6C1-9E56E8653D38}" type="pres">
-      <dgm:prSet presAssocID="{4AAFD291-9C0B-4CEF-B766-DF8494E81A43}" presName="sp" presStyleCnt="0"/>
-      <dgm:spPr/>
-    </dgm:pt>
-    <dgm:pt modelId="{70EB74FD-6914-435D-88CA-4005C81CB03C}" type="pres">
-      <dgm:prSet presAssocID="{D262F73C-39B3-428F-9284-98725730645B}" presName="linNode" presStyleCnt="0"/>
-      <dgm:spPr/>
-    </dgm:pt>
-    <dgm:pt modelId="{E47B67E0-569F-4426-9055-20FCEA9BC8D2}" type="pres">
-      <dgm:prSet presAssocID="{D262F73C-39B3-428F-9284-98725730645B}" presName="parentText" presStyleLbl="node1" presStyleIdx="1" presStyleCnt="11">
+    <dgm:pt modelId="{78CFA5F1-AD3F-46D5-8863-70C2A2C9750F}" type="pres">
+      <dgm:prSet presAssocID="{E30F4295-8BE6-4AC5-8BA1-1CECD5B64619}" presName="sp" presStyleCnt="0"/>
+      <dgm:spPr/>
+    </dgm:pt>
+    <dgm:pt modelId="{8A95F0A6-F46F-4881-840D-899EB4DBA6BD}" type="pres">
+      <dgm:prSet presAssocID="{93C5C6EE-232C-403A-8B36-B7247671CDED}" presName="linNode" presStyleCnt="0"/>
+      <dgm:spPr/>
+    </dgm:pt>
+    <dgm:pt modelId="{8E67A5F0-22B8-4B96-8928-46D66946FFE1}" type="pres">
+      <dgm:prSet presAssocID="{93C5C6EE-232C-403A-8B36-B7247671CDED}" presName="parentText" presStyleLbl="node1" presStyleIdx="1" presStyleCnt="13">
         <dgm:presLayoutVars>
           <dgm:chMax val="1"/>
           <dgm:bulletEnabled val="1"/>
@@ -8514,24 +8673,24 @@
       </dgm:prSet>
       <dgm:spPr/>
     </dgm:pt>
-    <dgm:pt modelId="{FAABE7F5-1683-464A-B4C4-5F4236F6AD44}" type="pres">
-      <dgm:prSet presAssocID="{D262F73C-39B3-428F-9284-98725730645B}" presName="descendantText" presStyleLbl="alignAccFollowNode1" presStyleIdx="1" presStyleCnt="11">
+    <dgm:pt modelId="{AA1EB86B-5429-4533-8D79-C27F4A99378A}" type="pres">
+      <dgm:prSet presAssocID="{93C5C6EE-232C-403A-8B36-B7247671CDED}" presName="descendantText" presStyleLbl="alignAccFollowNode1" presStyleIdx="1" presStyleCnt="13">
         <dgm:presLayoutVars>
           <dgm:bulletEnabled val="1"/>
         </dgm:presLayoutVars>
       </dgm:prSet>
       <dgm:spPr/>
     </dgm:pt>
-    <dgm:pt modelId="{49BD7EF0-0B4B-4D3D-B684-4AC47BFEA5BE}" type="pres">
-      <dgm:prSet presAssocID="{EB9EA278-CC09-426C-94E5-FB9705221FCB}" presName="sp" presStyleCnt="0"/>
-      <dgm:spPr/>
-    </dgm:pt>
-    <dgm:pt modelId="{4412F307-CD0B-43FF-A78B-5B7C0E0C3DEF}" type="pres">
-      <dgm:prSet presAssocID="{0EA86E49-E858-41CE-8D43-97A08FE90A37}" presName="linNode" presStyleCnt="0"/>
-      <dgm:spPr/>
-    </dgm:pt>
-    <dgm:pt modelId="{7ED2616D-3965-4CD9-BF4D-6CDCBBA52BAC}" type="pres">
-      <dgm:prSet presAssocID="{0EA86E49-E858-41CE-8D43-97A08FE90A37}" presName="parentText" presStyleLbl="node1" presStyleIdx="2" presStyleCnt="11">
+    <dgm:pt modelId="{F0E5F50B-D116-4084-B71A-8A921884B6AC}" type="pres">
+      <dgm:prSet presAssocID="{7F38D61E-E8FD-47DB-A30F-798D40691C51}" presName="sp" presStyleCnt="0"/>
+      <dgm:spPr/>
+    </dgm:pt>
+    <dgm:pt modelId="{4AD4B38E-16EB-4DE7-8482-A393A442B025}" type="pres">
+      <dgm:prSet presAssocID="{91FE08E5-D0B0-4A32-AD9B-5986F438BA14}" presName="linNode" presStyleCnt="0"/>
+      <dgm:spPr/>
+    </dgm:pt>
+    <dgm:pt modelId="{F12FCF34-9E88-4F3C-B75C-BD6AE8E40F6E}" type="pres">
+      <dgm:prSet presAssocID="{91FE08E5-D0B0-4A32-AD9B-5986F438BA14}" presName="parentText" presStyleLbl="node1" presStyleIdx="2" presStyleCnt="13">
         <dgm:presLayoutVars>
           <dgm:chMax val="1"/>
           <dgm:bulletEnabled val="1"/>
@@ -8539,24 +8698,24 @@
       </dgm:prSet>
       <dgm:spPr/>
     </dgm:pt>
-    <dgm:pt modelId="{6AB1550E-C385-4718-AB89-FF17CF59F285}" type="pres">
-      <dgm:prSet presAssocID="{0EA86E49-E858-41CE-8D43-97A08FE90A37}" presName="descendantText" presStyleLbl="alignAccFollowNode1" presStyleIdx="2" presStyleCnt="11">
+    <dgm:pt modelId="{252247C1-1B56-4D8C-87FB-B27098B6AD39}" type="pres">
+      <dgm:prSet presAssocID="{91FE08E5-D0B0-4A32-AD9B-5986F438BA14}" presName="descendantText" presStyleLbl="alignAccFollowNode1" presStyleIdx="2" presStyleCnt="13">
         <dgm:presLayoutVars>
           <dgm:bulletEnabled val="1"/>
         </dgm:presLayoutVars>
       </dgm:prSet>
       <dgm:spPr/>
     </dgm:pt>
-    <dgm:pt modelId="{3B05BAB9-95E3-473B-B981-779D1DB6C606}" type="pres">
-      <dgm:prSet presAssocID="{5B545F06-B24E-44DD-A2DF-A45B35247BB4}" presName="sp" presStyleCnt="0"/>
-      <dgm:spPr/>
-    </dgm:pt>
-    <dgm:pt modelId="{57A39BB0-8133-498C-AA28-169B693AC808}" type="pres">
-      <dgm:prSet presAssocID="{07A14C35-96C2-4FFD-ACFD-3A88BD1DA94C}" presName="linNode" presStyleCnt="0"/>
-      <dgm:spPr/>
-    </dgm:pt>
-    <dgm:pt modelId="{D50219D7-709A-4BEC-B02B-FACFFE1B4F1E}" type="pres">
-      <dgm:prSet presAssocID="{07A14C35-96C2-4FFD-ACFD-3A88BD1DA94C}" presName="parentText" presStyleLbl="node1" presStyleIdx="3" presStyleCnt="11">
+    <dgm:pt modelId="{C368BBDB-D78D-47D2-A6C1-9E56E8653D38}" type="pres">
+      <dgm:prSet presAssocID="{4AAFD291-9C0B-4CEF-B766-DF8494E81A43}" presName="sp" presStyleCnt="0"/>
+      <dgm:spPr/>
+    </dgm:pt>
+    <dgm:pt modelId="{70EB74FD-6914-435D-88CA-4005C81CB03C}" type="pres">
+      <dgm:prSet presAssocID="{D262F73C-39B3-428F-9284-98725730645B}" presName="linNode" presStyleCnt="0"/>
+      <dgm:spPr/>
+    </dgm:pt>
+    <dgm:pt modelId="{E47B67E0-569F-4426-9055-20FCEA9BC8D2}" type="pres">
+      <dgm:prSet presAssocID="{D262F73C-39B3-428F-9284-98725730645B}" presName="parentText" presStyleLbl="node1" presStyleIdx="3" presStyleCnt="13">
         <dgm:presLayoutVars>
           <dgm:chMax val="1"/>
           <dgm:bulletEnabled val="1"/>
@@ -8564,24 +8723,24 @@
       </dgm:prSet>
       <dgm:spPr/>
     </dgm:pt>
-    <dgm:pt modelId="{3BEDDF74-E637-43B3-8A8B-DFFFE1BF03F8}" type="pres">
-      <dgm:prSet presAssocID="{07A14C35-96C2-4FFD-ACFD-3A88BD1DA94C}" presName="descendantText" presStyleLbl="alignAccFollowNode1" presStyleIdx="3" presStyleCnt="11">
+    <dgm:pt modelId="{FAABE7F5-1683-464A-B4C4-5F4236F6AD44}" type="pres">
+      <dgm:prSet presAssocID="{D262F73C-39B3-428F-9284-98725730645B}" presName="descendantText" presStyleLbl="alignAccFollowNode1" presStyleIdx="3" presStyleCnt="13">
         <dgm:presLayoutVars>
           <dgm:bulletEnabled val="1"/>
         </dgm:presLayoutVars>
       </dgm:prSet>
       <dgm:spPr/>
     </dgm:pt>
-    <dgm:pt modelId="{E1975D3A-0C31-4F0A-A630-B9D9AEDDBB97}" type="pres">
-      <dgm:prSet presAssocID="{00678DCC-CDB3-4E02-A74E-299767509B2C}" presName="sp" presStyleCnt="0"/>
-      <dgm:spPr/>
-    </dgm:pt>
-    <dgm:pt modelId="{8B61C97A-211F-43CC-858B-F4955626F216}" type="pres">
-      <dgm:prSet presAssocID="{1AD8BBF2-5518-453B-A550-3E7FA8C485B6}" presName="linNode" presStyleCnt="0"/>
-      <dgm:spPr/>
-    </dgm:pt>
-    <dgm:pt modelId="{0AE97034-2EEA-4546-B6E1-4FED6E26618F}" type="pres">
-      <dgm:prSet presAssocID="{1AD8BBF2-5518-453B-A550-3E7FA8C485B6}" presName="parentText" presStyleLbl="node1" presStyleIdx="4" presStyleCnt="11">
+    <dgm:pt modelId="{49BD7EF0-0B4B-4D3D-B684-4AC47BFEA5BE}" type="pres">
+      <dgm:prSet presAssocID="{EB9EA278-CC09-426C-94E5-FB9705221FCB}" presName="sp" presStyleCnt="0"/>
+      <dgm:spPr/>
+    </dgm:pt>
+    <dgm:pt modelId="{4412F307-CD0B-43FF-A78B-5B7C0E0C3DEF}" type="pres">
+      <dgm:prSet presAssocID="{0EA86E49-E858-41CE-8D43-97A08FE90A37}" presName="linNode" presStyleCnt="0"/>
+      <dgm:spPr/>
+    </dgm:pt>
+    <dgm:pt modelId="{7ED2616D-3965-4CD9-BF4D-6CDCBBA52BAC}" type="pres">
+      <dgm:prSet presAssocID="{0EA86E49-E858-41CE-8D43-97A08FE90A37}" presName="parentText" presStyleLbl="node1" presStyleIdx="4" presStyleCnt="13">
         <dgm:presLayoutVars>
           <dgm:chMax val="1"/>
           <dgm:bulletEnabled val="1"/>
@@ -8589,24 +8748,24 @@
       </dgm:prSet>
       <dgm:spPr/>
     </dgm:pt>
-    <dgm:pt modelId="{8D19A966-B752-413D-884D-47C9FC61B37F}" type="pres">
-      <dgm:prSet presAssocID="{1AD8BBF2-5518-453B-A550-3E7FA8C485B6}" presName="descendantText" presStyleLbl="alignAccFollowNode1" presStyleIdx="4" presStyleCnt="11">
+    <dgm:pt modelId="{6AB1550E-C385-4718-AB89-FF17CF59F285}" type="pres">
+      <dgm:prSet presAssocID="{0EA86E49-E858-41CE-8D43-97A08FE90A37}" presName="descendantText" presStyleLbl="alignAccFollowNode1" presStyleIdx="4" presStyleCnt="13">
         <dgm:presLayoutVars>
           <dgm:bulletEnabled val="1"/>
         </dgm:presLayoutVars>
       </dgm:prSet>
       <dgm:spPr/>
     </dgm:pt>
-    <dgm:pt modelId="{05D627BE-D8E1-4913-B69F-10D01221A230}" type="pres">
-      <dgm:prSet presAssocID="{8B4762E4-E3A1-4FDF-A8CC-E606ECE0D740}" presName="sp" presStyleCnt="0"/>
-      <dgm:spPr/>
-    </dgm:pt>
-    <dgm:pt modelId="{7659B1DD-86C0-43F6-8756-E9AFE76A6532}" type="pres">
-      <dgm:prSet presAssocID="{6687B58C-7FED-4E13-8181-3B695C44E832}" presName="linNode" presStyleCnt="0"/>
-      <dgm:spPr/>
-    </dgm:pt>
-    <dgm:pt modelId="{420DC76F-67CB-4E7F-B46E-2E6148ED358C}" type="pres">
-      <dgm:prSet presAssocID="{6687B58C-7FED-4E13-8181-3B695C44E832}" presName="parentText" presStyleLbl="node1" presStyleIdx="5" presStyleCnt="11">
+    <dgm:pt modelId="{3B05BAB9-95E3-473B-B981-779D1DB6C606}" type="pres">
+      <dgm:prSet presAssocID="{5B545F06-B24E-44DD-A2DF-A45B35247BB4}" presName="sp" presStyleCnt="0"/>
+      <dgm:spPr/>
+    </dgm:pt>
+    <dgm:pt modelId="{57A39BB0-8133-498C-AA28-169B693AC808}" type="pres">
+      <dgm:prSet presAssocID="{07A14C35-96C2-4FFD-ACFD-3A88BD1DA94C}" presName="linNode" presStyleCnt="0"/>
+      <dgm:spPr/>
+    </dgm:pt>
+    <dgm:pt modelId="{D50219D7-709A-4BEC-B02B-FACFFE1B4F1E}" type="pres">
+      <dgm:prSet presAssocID="{07A14C35-96C2-4FFD-ACFD-3A88BD1DA94C}" presName="parentText" presStyleLbl="node1" presStyleIdx="5" presStyleCnt="13">
         <dgm:presLayoutVars>
           <dgm:chMax val="1"/>
           <dgm:bulletEnabled val="1"/>
@@ -8614,24 +8773,24 @@
       </dgm:prSet>
       <dgm:spPr/>
     </dgm:pt>
-    <dgm:pt modelId="{6CDEE012-C9C5-4A17-838B-A6C32B86F9FD}" type="pres">
-      <dgm:prSet presAssocID="{6687B58C-7FED-4E13-8181-3B695C44E832}" presName="descendantText" presStyleLbl="alignAccFollowNode1" presStyleIdx="5" presStyleCnt="11">
+    <dgm:pt modelId="{3BEDDF74-E637-43B3-8A8B-DFFFE1BF03F8}" type="pres">
+      <dgm:prSet presAssocID="{07A14C35-96C2-4FFD-ACFD-3A88BD1DA94C}" presName="descendantText" presStyleLbl="alignAccFollowNode1" presStyleIdx="5" presStyleCnt="13">
         <dgm:presLayoutVars>
           <dgm:bulletEnabled val="1"/>
         </dgm:presLayoutVars>
       </dgm:prSet>
       <dgm:spPr/>
     </dgm:pt>
-    <dgm:pt modelId="{33B6A121-0C7D-4E4B-A4EE-AC006BC16A93}" type="pres">
-      <dgm:prSet presAssocID="{D8FA8046-662C-43DC-A603-FDE066D76FE0}" presName="sp" presStyleCnt="0"/>
-      <dgm:spPr/>
-    </dgm:pt>
-    <dgm:pt modelId="{F006D19A-3104-4C63-A9DA-B9E49927076D}" type="pres">
-      <dgm:prSet presAssocID="{983C3A0F-4CC3-4C0C-BF60-57DF46D0D91F}" presName="linNode" presStyleCnt="0"/>
-      <dgm:spPr/>
-    </dgm:pt>
-    <dgm:pt modelId="{37DDD804-7468-4745-86EB-0ADFEB1882A6}" type="pres">
-      <dgm:prSet presAssocID="{983C3A0F-4CC3-4C0C-BF60-57DF46D0D91F}" presName="parentText" presStyleLbl="node1" presStyleIdx="6" presStyleCnt="11">
+    <dgm:pt modelId="{E1975D3A-0C31-4F0A-A630-B9D9AEDDBB97}" type="pres">
+      <dgm:prSet presAssocID="{00678DCC-CDB3-4E02-A74E-299767509B2C}" presName="sp" presStyleCnt="0"/>
+      <dgm:spPr/>
+    </dgm:pt>
+    <dgm:pt modelId="{8B61C97A-211F-43CC-858B-F4955626F216}" type="pres">
+      <dgm:prSet presAssocID="{1AD8BBF2-5518-453B-A550-3E7FA8C485B6}" presName="linNode" presStyleCnt="0"/>
+      <dgm:spPr/>
+    </dgm:pt>
+    <dgm:pt modelId="{0AE97034-2EEA-4546-B6E1-4FED6E26618F}" type="pres">
+      <dgm:prSet presAssocID="{1AD8BBF2-5518-453B-A550-3E7FA8C485B6}" presName="parentText" presStyleLbl="node1" presStyleIdx="6" presStyleCnt="13">
         <dgm:presLayoutVars>
           <dgm:chMax val="1"/>
           <dgm:bulletEnabled val="1"/>
@@ -8639,24 +8798,24 @@
       </dgm:prSet>
       <dgm:spPr/>
     </dgm:pt>
-    <dgm:pt modelId="{11A37157-747C-4EF9-86E3-7060FDB3EDCF}" type="pres">
-      <dgm:prSet presAssocID="{983C3A0F-4CC3-4C0C-BF60-57DF46D0D91F}" presName="descendantText" presStyleLbl="alignAccFollowNode1" presStyleIdx="6" presStyleCnt="11">
+    <dgm:pt modelId="{8D19A966-B752-413D-884D-47C9FC61B37F}" type="pres">
+      <dgm:prSet presAssocID="{1AD8BBF2-5518-453B-A550-3E7FA8C485B6}" presName="descendantText" presStyleLbl="alignAccFollowNode1" presStyleIdx="6" presStyleCnt="13">
         <dgm:presLayoutVars>
           <dgm:bulletEnabled val="1"/>
         </dgm:presLayoutVars>
       </dgm:prSet>
       <dgm:spPr/>
     </dgm:pt>
-    <dgm:pt modelId="{11B91D39-325A-47B8-85EA-460A59624191}" type="pres">
-      <dgm:prSet presAssocID="{526F4B0F-6DD3-49A2-BE66-A78CA05C246E}" presName="sp" presStyleCnt="0"/>
-      <dgm:spPr/>
-    </dgm:pt>
-    <dgm:pt modelId="{371D014F-7818-4FED-AD98-CDAB06350D8B}" type="pres">
-      <dgm:prSet presAssocID="{8E9A8F67-21C2-4DC7-93DE-83AB68EF939C}" presName="linNode" presStyleCnt="0"/>
-      <dgm:spPr/>
-    </dgm:pt>
-    <dgm:pt modelId="{15B1535D-7A2F-4187-BF40-F7B12325C164}" type="pres">
-      <dgm:prSet presAssocID="{8E9A8F67-21C2-4DC7-93DE-83AB68EF939C}" presName="parentText" presStyleLbl="node1" presStyleIdx="7" presStyleCnt="11">
+    <dgm:pt modelId="{05D627BE-D8E1-4913-B69F-10D01221A230}" type="pres">
+      <dgm:prSet presAssocID="{8B4762E4-E3A1-4FDF-A8CC-E606ECE0D740}" presName="sp" presStyleCnt="0"/>
+      <dgm:spPr/>
+    </dgm:pt>
+    <dgm:pt modelId="{7659B1DD-86C0-43F6-8756-E9AFE76A6532}" type="pres">
+      <dgm:prSet presAssocID="{6687B58C-7FED-4E13-8181-3B695C44E832}" presName="linNode" presStyleCnt="0"/>
+      <dgm:spPr/>
+    </dgm:pt>
+    <dgm:pt modelId="{420DC76F-67CB-4E7F-B46E-2E6148ED358C}" type="pres">
+      <dgm:prSet presAssocID="{6687B58C-7FED-4E13-8181-3B695C44E832}" presName="parentText" presStyleLbl="node1" presStyleIdx="7" presStyleCnt="13">
         <dgm:presLayoutVars>
           <dgm:chMax val="1"/>
           <dgm:bulletEnabled val="1"/>
@@ -8664,24 +8823,24 @@
       </dgm:prSet>
       <dgm:spPr/>
     </dgm:pt>
-    <dgm:pt modelId="{70E40ED8-44BE-430D-B675-928F3AAF69F6}" type="pres">
-      <dgm:prSet presAssocID="{8E9A8F67-21C2-4DC7-93DE-83AB68EF939C}" presName="descendantText" presStyleLbl="alignAccFollowNode1" presStyleIdx="7" presStyleCnt="11">
+    <dgm:pt modelId="{6CDEE012-C9C5-4A17-838B-A6C32B86F9FD}" type="pres">
+      <dgm:prSet presAssocID="{6687B58C-7FED-4E13-8181-3B695C44E832}" presName="descendantText" presStyleLbl="alignAccFollowNode1" presStyleIdx="7" presStyleCnt="13">
         <dgm:presLayoutVars>
           <dgm:bulletEnabled val="1"/>
         </dgm:presLayoutVars>
       </dgm:prSet>
       <dgm:spPr/>
     </dgm:pt>
-    <dgm:pt modelId="{B91562B5-AAC5-49AA-AE45-896A131D0023}" type="pres">
-      <dgm:prSet presAssocID="{14F26015-A95D-4C6C-BAF7-62AEBFC532F7}" presName="sp" presStyleCnt="0"/>
-      <dgm:spPr/>
-    </dgm:pt>
-    <dgm:pt modelId="{DC6BB8BD-8D2C-4B08-92FA-62CB87045263}" type="pres">
-      <dgm:prSet presAssocID="{0420C3E2-AC1A-45FF-9EF7-4296E4BF5D3C}" presName="linNode" presStyleCnt="0"/>
-      <dgm:spPr/>
-    </dgm:pt>
-    <dgm:pt modelId="{1DD2327A-0023-43BD-AE1D-76839AC91220}" type="pres">
-      <dgm:prSet presAssocID="{0420C3E2-AC1A-45FF-9EF7-4296E4BF5D3C}" presName="parentText" presStyleLbl="node1" presStyleIdx="8" presStyleCnt="11">
+    <dgm:pt modelId="{33B6A121-0C7D-4E4B-A4EE-AC006BC16A93}" type="pres">
+      <dgm:prSet presAssocID="{D8FA8046-662C-43DC-A603-FDE066D76FE0}" presName="sp" presStyleCnt="0"/>
+      <dgm:spPr/>
+    </dgm:pt>
+    <dgm:pt modelId="{F006D19A-3104-4C63-A9DA-B9E49927076D}" type="pres">
+      <dgm:prSet presAssocID="{983C3A0F-4CC3-4C0C-BF60-57DF46D0D91F}" presName="linNode" presStyleCnt="0"/>
+      <dgm:spPr/>
+    </dgm:pt>
+    <dgm:pt modelId="{37DDD804-7468-4745-86EB-0ADFEB1882A6}" type="pres">
+      <dgm:prSet presAssocID="{983C3A0F-4CC3-4C0C-BF60-57DF46D0D91F}" presName="parentText" presStyleLbl="node1" presStyleIdx="8" presStyleCnt="13">
         <dgm:presLayoutVars>
           <dgm:chMax val="1"/>
           <dgm:bulletEnabled val="1"/>
@@ -8689,24 +8848,24 @@
       </dgm:prSet>
       <dgm:spPr/>
     </dgm:pt>
-    <dgm:pt modelId="{A66FD841-E172-4F54-A46D-4FEB62724531}" type="pres">
-      <dgm:prSet presAssocID="{0420C3E2-AC1A-45FF-9EF7-4296E4BF5D3C}" presName="descendantText" presStyleLbl="alignAccFollowNode1" presStyleIdx="8" presStyleCnt="11">
+    <dgm:pt modelId="{11A37157-747C-4EF9-86E3-7060FDB3EDCF}" type="pres">
+      <dgm:prSet presAssocID="{983C3A0F-4CC3-4C0C-BF60-57DF46D0D91F}" presName="descendantText" presStyleLbl="alignAccFollowNode1" presStyleIdx="8" presStyleCnt="13">
         <dgm:presLayoutVars>
           <dgm:bulletEnabled val="1"/>
         </dgm:presLayoutVars>
       </dgm:prSet>
       <dgm:spPr/>
     </dgm:pt>
-    <dgm:pt modelId="{295A0221-CC3F-49AC-BF83-475100CFBFE3}" type="pres">
-      <dgm:prSet presAssocID="{1EA20CFF-E163-4B52-AA53-EE0B5E963D3E}" presName="sp" presStyleCnt="0"/>
-      <dgm:spPr/>
-    </dgm:pt>
-    <dgm:pt modelId="{FB7A206E-7E3B-462F-AC23-30C2571DB0C3}" type="pres">
-      <dgm:prSet presAssocID="{966F4DBE-18B7-4C9E-B571-3C26A7DFEE84}" presName="linNode" presStyleCnt="0"/>
-      <dgm:spPr/>
-    </dgm:pt>
-    <dgm:pt modelId="{34510324-D802-4FC9-9901-97AFD6953F67}" type="pres">
-      <dgm:prSet presAssocID="{966F4DBE-18B7-4C9E-B571-3C26A7DFEE84}" presName="parentText" presStyleLbl="node1" presStyleIdx="9" presStyleCnt="11">
+    <dgm:pt modelId="{11B91D39-325A-47B8-85EA-460A59624191}" type="pres">
+      <dgm:prSet presAssocID="{526F4B0F-6DD3-49A2-BE66-A78CA05C246E}" presName="sp" presStyleCnt="0"/>
+      <dgm:spPr/>
+    </dgm:pt>
+    <dgm:pt modelId="{371D014F-7818-4FED-AD98-CDAB06350D8B}" type="pres">
+      <dgm:prSet presAssocID="{8E9A8F67-21C2-4DC7-93DE-83AB68EF939C}" presName="linNode" presStyleCnt="0"/>
+      <dgm:spPr/>
+    </dgm:pt>
+    <dgm:pt modelId="{15B1535D-7A2F-4187-BF40-F7B12325C164}" type="pres">
+      <dgm:prSet presAssocID="{8E9A8F67-21C2-4DC7-93DE-83AB68EF939C}" presName="parentText" presStyleLbl="node1" presStyleIdx="9" presStyleCnt="13">
         <dgm:presLayoutVars>
           <dgm:chMax val="1"/>
           <dgm:bulletEnabled val="1"/>
@@ -8714,24 +8873,24 @@
       </dgm:prSet>
       <dgm:spPr/>
     </dgm:pt>
-    <dgm:pt modelId="{584C82D3-8114-4ECC-ACD2-0C383433147E}" type="pres">
-      <dgm:prSet presAssocID="{966F4DBE-18B7-4C9E-B571-3C26A7DFEE84}" presName="descendantText" presStyleLbl="alignAccFollowNode1" presStyleIdx="9" presStyleCnt="11">
+    <dgm:pt modelId="{70E40ED8-44BE-430D-B675-928F3AAF69F6}" type="pres">
+      <dgm:prSet presAssocID="{8E9A8F67-21C2-4DC7-93DE-83AB68EF939C}" presName="descendantText" presStyleLbl="alignAccFollowNode1" presStyleIdx="9" presStyleCnt="13">
         <dgm:presLayoutVars>
           <dgm:bulletEnabled val="1"/>
         </dgm:presLayoutVars>
       </dgm:prSet>
       <dgm:spPr/>
     </dgm:pt>
-    <dgm:pt modelId="{44C143E0-6F71-4274-9076-D8124C48095E}" type="pres">
-      <dgm:prSet presAssocID="{4C7B4F99-2B19-46BD-A4A9-4DE2A244C0F0}" presName="sp" presStyleCnt="0"/>
-      <dgm:spPr/>
-    </dgm:pt>
-    <dgm:pt modelId="{64E37F42-7A59-4440-8534-1517B5C1CBBA}" type="pres">
-      <dgm:prSet presAssocID="{185F8216-23A1-4FB2-B349-994231C46ED1}" presName="linNode" presStyleCnt="0"/>
-      <dgm:spPr/>
-    </dgm:pt>
-    <dgm:pt modelId="{6A499025-F9DF-477C-8373-2FD3C48E42CD}" type="pres">
-      <dgm:prSet presAssocID="{185F8216-23A1-4FB2-B349-994231C46ED1}" presName="parentText" presStyleLbl="node1" presStyleIdx="10" presStyleCnt="11">
+    <dgm:pt modelId="{B91562B5-AAC5-49AA-AE45-896A131D0023}" type="pres">
+      <dgm:prSet presAssocID="{14F26015-A95D-4C6C-BAF7-62AEBFC532F7}" presName="sp" presStyleCnt="0"/>
+      <dgm:spPr/>
+    </dgm:pt>
+    <dgm:pt modelId="{DC6BB8BD-8D2C-4B08-92FA-62CB87045263}" type="pres">
+      <dgm:prSet presAssocID="{0420C3E2-AC1A-45FF-9EF7-4296E4BF5D3C}" presName="linNode" presStyleCnt="0"/>
+      <dgm:spPr/>
+    </dgm:pt>
+    <dgm:pt modelId="{1DD2327A-0023-43BD-AE1D-76839AC91220}" type="pres">
+      <dgm:prSet presAssocID="{0420C3E2-AC1A-45FF-9EF7-4296E4BF5D3C}" presName="parentText" presStyleLbl="node1" presStyleIdx="10" presStyleCnt="13">
         <dgm:presLayoutVars>
           <dgm:chMax val="1"/>
           <dgm:bulletEnabled val="1"/>
@@ -8739,36 +8898,88 @@
       </dgm:prSet>
       <dgm:spPr/>
     </dgm:pt>
-    <dgm:pt modelId="{A16281FF-B68A-4B29-9589-85A8639DAE3B}" type="pres">
-      <dgm:prSet presAssocID="{185F8216-23A1-4FB2-B349-994231C46ED1}" presName="descendantText" presStyleLbl="alignAccFollowNode1" presStyleIdx="10" presStyleCnt="11">
+    <dgm:pt modelId="{A66FD841-E172-4F54-A46D-4FEB62724531}" type="pres">
+      <dgm:prSet presAssocID="{0420C3E2-AC1A-45FF-9EF7-4296E4BF5D3C}" presName="descendantText" presStyleLbl="alignAccFollowNode1" presStyleIdx="10" presStyleCnt="13">
         <dgm:presLayoutVars>
           <dgm:bulletEnabled val="1"/>
         </dgm:presLayoutVars>
       </dgm:prSet>
       <dgm:spPr/>
     </dgm:pt>
+    <dgm:pt modelId="{295A0221-CC3F-49AC-BF83-475100CFBFE3}" type="pres">
+      <dgm:prSet presAssocID="{1EA20CFF-E163-4B52-AA53-EE0B5E963D3E}" presName="sp" presStyleCnt="0"/>
+      <dgm:spPr/>
+    </dgm:pt>
+    <dgm:pt modelId="{FB7A206E-7E3B-462F-AC23-30C2571DB0C3}" type="pres">
+      <dgm:prSet presAssocID="{966F4DBE-18B7-4C9E-B571-3C26A7DFEE84}" presName="linNode" presStyleCnt="0"/>
+      <dgm:spPr/>
+    </dgm:pt>
+    <dgm:pt modelId="{34510324-D802-4FC9-9901-97AFD6953F67}" type="pres">
+      <dgm:prSet presAssocID="{966F4DBE-18B7-4C9E-B571-3C26A7DFEE84}" presName="parentText" presStyleLbl="node1" presStyleIdx="11" presStyleCnt="13">
+        <dgm:presLayoutVars>
+          <dgm:chMax val="1"/>
+          <dgm:bulletEnabled val="1"/>
+        </dgm:presLayoutVars>
+      </dgm:prSet>
+      <dgm:spPr/>
+    </dgm:pt>
+    <dgm:pt modelId="{584C82D3-8114-4ECC-ACD2-0C383433147E}" type="pres">
+      <dgm:prSet presAssocID="{966F4DBE-18B7-4C9E-B571-3C26A7DFEE84}" presName="descendantText" presStyleLbl="alignAccFollowNode1" presStyleIdx="11" presStyleCnt="13">
+        <dgm:presLayoutVars>
+          <dgm:bulletEnabled val="1"/>
+        </dgm:presLayoutVars>
+      </dgm:prSet>
+      <dgm:spPr/>
+    </dgm:pt>
+    <dgm:pt modelId="{44C143E0-6F71-4274-9076-D8124C48095E}" type="pres">
+      <dgm:prSet presAssocID="{4C7B4F99-2B19-46BD-A4A9-4DE2A244C0F0}" presName="sp" presStyleCnt="0"/>
+      <dgm:spPr/>
+    </dgm:pt>
+    <dgm:pt modelId="{64E37F42-7A59-4440-8534-1517B5C1CBBA}" type="pres">
+      <dgm:prSet presAssocID="{185F8216-23A1-4FB2-B349-994231C46ED1}" presName="linNode" presStyleCnt="0"/>
+      <dgm:spPr/>
+    </dgm:pt>
+    <dgm:pt modelId="{6A499025-F9DF-477C-8373-2FD3C48E42CD}" type="pres">
+      <dgm:prSet presAssocID="{185F8216-23A1-4FB2-B349-994231C46ED1}" presName="parentText" presStyleLbl="node1" presStyleIdx="12" presStyleCnt="13">
+        <dgm:presLayoutVars>
+          <dgm:chMax val="1"/>
+          <dgm:bulletEnabled val="1"/>
+        </dgm:presLayoutVars>
+      </dgm:prSet>
+      <dgm:spPr/>
+    </dgm:pt>
+    <dgm:pt modelId="{A16281FF-B68A-4B29-9589-85A8639DAE3B}" type="pres">
+      <dgm:prSet presAssocID="{185F8216-23A1-4FB2-B349-994231C46ED1}" presName="descendantText" presStyleLbl="alignAccFollowNode1" presStyleIdx="12" presStyleCnt="13">
+        <dgm:presLayoutVars>
+          <dgm:bulletEnabled val="1"/>
+        </dgm:presLayoutVars>
+      </dgm:prSet>
+      <dgm:spPr/>
+    </dgm:pt>
   </dgm:ptLst>
   <dgm:cxnLst>
     <dgm:cxn modelId="{0ECD2F01-5E2A-4529-A8A7-3C63957120CC}" srcId="{07A14C35-96C2-4FFD-ACFD-3A88BD1DA94C}" destId="{E7F86EF7-6DB4-4C76-8ED2-2F26C7863E76}" srcOrd="0" destOrd="0" parTransId="{E4FFDEF2-813A-4E1A-9414-BE82A938685A}" sibTransId="{DED5094A-6258-40B0-83C1-AA2084EA6132}"/>
     <dgm:cxn modelId="{592DED06-A3ED-4401-9262-A47D9A9EE3BA}" srcId="{0420C3E2-AC1A-45FF-9EF7-4296E4BF5D3C}" destId="{82E0C83C-052B-4AC6-A9A9-2C20F67A5624}" srcOrd="0" destOrd="0" parTransId="{EC1A0C41-07BE-4A6E-A4E7-0D943109EEB0}" sibTransId="{593E7D2A-7550-4C6B-B7FD-413BE61BFDA6}"/>
-    <dgm:cxn modelId="{4AD9C709-23A1-4056-A9AE-A1DC860C3E64}" srcId="{E3810C7A-162E-4F59-A5CC-D6E55AA7937F}" destId="{07A14C35-96C2-4FFD-ACFD-3A88BD1DA94C}" srcOrd="3" destOrd="0" parTransId="{DEDA2874-FC48-4B8D-9607-6E36EE4EDC7A}" sibTransId="{00678DCC-CDB3-4E02-A74E-299767509B2C}"/>
-    <dgm:cxn modelId="{C026EE0F-3EC0-44CE-A6B3-1EE86F54462E}" srcId="{E3810C7A-162E-4F59-A5CC-D6E55AA7937F}" destId="{1AD8BBF2-5518-453B-A550-3E7FA8C485B6}" srcOrd="4" destOrd="0" parTransId="{DDA9ED82-BF45-47F6-A1E3-825A433700A7}" sibTransId="{8B4762E4-E3A1-4FDF-A8CC-E606ECE0D740}"/>
+    <dgm:cxn modelId="{4AD9C709-23A1-4056-A9AE-A1DC860C3E64}" srcId="{E3810C7A-162E-4F59-A5CC-D6E55AA7937F}" destId="{07A14C35-96C2-4FFD-ACFD-3A88BD1DA94C}" srcOrd="5" destOrd="0" parTransId="{DEDA2874-FC48-4B8D-9607-6E36EE4EDC7A}" sibTransId="{00678DCC-CDB3-4E02-A74E-299767509B2C}"/>
+    <dgm:cxn modelId="{BF87B50E-6723-4F55-BEF0-595A5C605226}" srcId="{E3810C7A-162E-4F59-A5CC-D6E55AA7937F}" destId="{5688624E-314A-43A9-9E5F-69EBD853F1ED}" srcOrd="0" destOrd="0" parTransId="{E00C8D54-BE95-45E3-8E05-55442F30C1FD}" sibTransId="{E30F4295-8BE6-4AC5-8BA1-1CECD5B64619}"/>
+    <dgm:cxn modelId="{C026EE0F-3EC0-44CE-A6B3-1EE86F54462E}" srcId="{E3810C7A-162E-4F59-A5CC-D6E55AA7937F}" destId="{1AD8BBF2-5518-453B-A550-3E7FA8C485B6}" srcOrd="6" destOrd="0" parTransId="{DDA9ED82-BF45-47F6-A1E3-825A433700A7}" sibTransId="{8B4762E4-E3A1-4FDF-A8CC-E606ECE0D740}"/>
     <dgm:cxn modelId="{7C0AD219-1D96-4D04-8386-D509793E5A3E}" srcId="{966F4DBE-18B7-4C9E-B571-3C26A7DFEE84}" destId="{CEFDD106-F9FC-402E-BFDF-39E622689F49}" srcOrd="0" destOrd="0" parTransId="{91FF41B1-5657-4469-9352-2A29EC71074D}" sibTransId="{EFC80601-5E3D-45F4-9EB4-4C20FBB6B675}"/>
+    <dgm:cxn modelId="{B2230D1D-E4AB-49D0-A18E-F45F6991EDD3}" srcId="{93C5C6EE-232C-403A-8B36-B7247671CDED}" destId="{D62B1B85-31BA-4EE1-A240-AA5907A9BE05}" srcOrd="0" destOrd="0" parTransId="{F8B11A85-4C27-4418-92C4-2864EE39D0AD}" sibTransId="{48FC96C0-8F65-468E-9C91-97CA1E1DD297}"/>
     <dgm:cxn modelId="{385E1921-1672-461F-B631-BB20CC5B6A1F}" type="presOf" srcId="{6687B58C-7FED-4E13-8181-3B695C44E832}" destId="{420DC76F-67CB-4E7F-B46E-2E6148ED358C}" srcOrd="0" destOrd="0" presId="urn:microsoft.com/office/officeart/2005/8/layout/vList5"/>
     <dgm:cxn modelId="{4166802A-65A2-4546-97F1-D1FDBC5B7E04}" srcId="{8E9A8F67-21C2-4DC7-93DE-83AB68EF939C}" destId="{A9EBFBFA-0405-4B1A-854B-6E9ACE1EC301}" srcOrd="0" destOrd="0" parTransId="{BFEA87ED-BF5B-4D67-B0F9-8B8381D3DCA1}" sibTransId="{151E4389-BB48-46E8-BD41-CB767C89C276}"/>
     <dgm:cxn modelId="{F142FE34-0F5C-425C-9E27-498BA21B6713}" type="presOf" srcId="{AEC05D31-F8A6-485B-A3C9-EA86D589F88C}" destId="{11A37157-747C-4EF9-86E3-7060FDB3EDCF}" srcOrd="0" destOrd="0" presId="urn:microsoft.com/office/officeart/2005/8/layout/vList5"/>
     <dgm:cxn modelId="{B0E48A40-292A-445B-B545-23AD0BB708A7}" type="presOf" srcId="{91FE08E5-D0B0-4A32-AD9B-5986F438BA14}" destId="{F12FCF34-9E88-4F3C-B75C-BD6AE8E40F6E}" srcOrd="0" destOrd="0" presId="urn:microsoft.com/office/officeart/2005/8/layout/vList5"/>
     <dgm:cxn modelId="{CF12B55C-3214-42F6-B8B4-6A255DF55B78}" srcId="{983C3A0F-4CC3-4C0C-BF60-57DF46D0D91F}" destId="{AEC05D31-F8A6-485B-A3C9-EA86D589F88C}" srcOrd="0" destOrd="0" parTransId="{C169B256-4B63-4601-829E-9F3FD5F78113}" sibTransId="{31F340C9-8A89-4781-A88E-BCBD035E26DB}"/>
-    <dgm:cxn modelId="{EC904C43-393B-426F-9551-5F52BC142F96}" srcId="{E3810C7A-162E-4F59-A5CC-D6E55AA7937F}" destId="{8E9A8F67-21C2-4DC7-93DE-83AB68EF939C}" srcOrd="7" destOrd="0" parTransId="{30174DA7-30F0-4FB8-9215-9FC2AB95A66D}" sibTransId="{14F26015-A95D-4C6C-BAF7-62AEBFC532F7}"/>
+    <dgm:cxn modelId="{EC904C43-393B-426F-9551-5F52BC142F96}" srcId="{E3810C7A-162E-4F59-A5CC-D6E55AA7937F}" destId="{8E9A8F67-21C2-4DC7-93DE-83AB68EF939C}" srcOrd="9" destOrd="0" parTransId="{30174DA7-30F0-4FB8-9215-9FC2AB95A66D}" sibTransId="{14F26015-A95D-4C6C-BAF7-62AEBFC532F7}"/>
     <dgm:cxn modelId="{69E64C44-F904-49CF-9045-87758088D773}" type="presOf" srcId="{BC3AF494-F305-4FD5-B04B-EF9F61936E59}" destId="{8D19A966-B752-413D-884D-47C9FC61B37F}" srcOrd="0" destOrd="0" presId="urn:microsoft.com/office/officeart/2005/8/layout/vList5"/>
     <dgm:cxn modelId="{49E90F68-1223-47BD-B579-9B86B0F4DAE8}" type="presOf" srcId="{A9EBFBFA-0405-4B1A-854B-6E9ACE1EC301}" destId="{70E40ED8-44BE-430D-B675-928F3AAF69F6}" srcOrd="0" destOrd="0" presId="urn:microsoft.com/office/officeart/2005/8/layout/vList5"/>
-    <dgm:cxn modelId="{9C8E5F69-5D10-4A0A-B134-B17B959A7A53}" srcId="{E3810C7A-162E-4F59-A5CC-D6E55AA7937F}" destId="{91FE08E5-D0B0-4A32-AD9B-5986F438BA14}" srcOrd="0" destOrd="0" parTransId="{986E5DF1-1BE2-4A77-B4F4-CDFAA68B8352}" sibTransId="{4AAFD291-9C0B-4CEF-B766-DF8494E81A43}"/>
+    <dgm:cxn modelId="{9C8E5F69-5D10-4A0A-B134-B17B959A7A53}" srcId="{E3810C7A-162E-4F59-A5CC-D6E55AA7937F}" destId="{91FE08E5-D0B0-4A32-AD9B-5986F438BA14}" srcOrd="2" destOrd="0" parTransId="{986E5DF1-1BE2-4A77-B4F4-CDFAA68B8352}" sibTransId="{4AAFD291-9C0B-4CEF-B766-DF8494E81A43}"/>
     <dgm:cxn modelId="{D869B949-D1C6-41B1-9D87-E0C4D7AFF3F9}" type="presOf" srcId="{185F8216-23A1-4FB2-B349-994231C46ED1}" destId="{6A499025-F9DF-477C-8373-2FD3C48E42CD}" srcOrd="0" destOrd="0" presId="urn:microsoft.com/office/officeart/2005/8/layout/vList5"/>
-    <dgm:cxn modelId="{703C686B-2862-4EF4-BF96-3997F381B24D}" srcId="{E3810C7A-162E-4F59-A5CC-D6E55AA7937F}" destId="{6687B58C-7FED-4E13-8181-3B695C44E832}" srcOrd="5" destOrd="0" parTransId="{777FF716-64E6-4784-8146-C9F4CCA8EB7D}" sibTransId="{D8FA8046-662C-43DC-A603-FDE066D76FE0}"/>
-    <dgm:cxn modelId="{B3AB346F-EC55-4408-8874-734C5D92366B}" srcId="{E3810C7A-162E-4F59-A5CC-D6E55AA7937F}" destId="{0420C3E2-AC1A-45FF-9EF7-4296E4BF5D3C}" srcOrd="8" destOrd="0" parTransId="{88A733A7-C4C2-400F-938A-3F26045ACE9B}" sibTransId="{1EA20CFF-E163-4B52-AA53-EE0B5E963D3E}"/>
+    <dgm:cxn modelId="{703C686B-2862-4EF4-BF96-3997F381B24D}" srcId="{E3810C7A-162E-4F59-A5CC-D6E55AA7937F}" destId="{6687B58C-7FED-4E13-8181-3B695C44E832}" srcOrd="7" destOrd="0" parTransId="{777FF716-64E6-4784-8146-C9F4CCA8EB7D}" sibTransId="{D8FA8046-662C-43DC-A603-FDE066D76FE0}"/>
+    <dgm:cxn modelId="{B3AB346F-EC55-4408-8874-734C5D92366B}" srcId="{E3810C7A-162E-4F59-A5CC-D6E55AA7937F}" destId="{0420C3E2-AC1A-45FF-9EF7-4296E4BF5D3C}" srcOrd="10" destOrd="0" parTransId="{88A733A7-C4C2-400F-938A-3F26045ACE9B}" sibTransId="{1EA20CFF-E163-4B52-AA53-EE0B5E963D3E}"/>
     <dgm:cxn modelId="{B8D36E50-4789-4E0B-BC10-D584B053D0F6}" srcId="{0EA86E49-E858-41CE-8D43-97A08FE90A37}" destId="{3BF2C142-4F28-4E87-9081-45691229DFC9}" srcOrd="0" destOrd="0" parTransId="{183E724E-C25B-4E96-BB5F-465D28592BD9}" sibTransId="{0139B7EC-1C99-48D0-B6AA-D9CC66A3E6AD}"/>
-    <dgm:cxn modelId="{5AFA6472-2AB6-4E16-840D-EA52D5F57D3A}" srcId="{E3810C7A-162E-4F59-A5CC-D6E55AA7937F}" destId="{0EA86E49-E858-41CE-8D43-97A08FE90A37}" srcOrd="2" destOrd="0" parTransId="{6FB4378A-EEC9-461D-B415-84AD0E9053CE}" sibTransId="{5B545F06-B24E-44DD-A2DF-A45B35247BB4}"/>
-    <dgm:cxn modelId="{E6DF4253-D9EE-43EB-B6FB-A8D97546088E}" srcId="{E3810C7A-162E-4F59-A5CC-D6E55AA7937F}" destId="{966F4DBE-18B7-4C9E-B571-3C26A7DFEE84}" srcOrd="9" destOrd="0" parTransId="{7A4F4309-1991-4F78-A164-910218B0DB35}" sibTransId="{4C7B4F99-2B19-46BD-A4A9-4DE2A244C0F0}"/>
+    <dgm:cxn modelId="{5AFA6472-2AB6-4E16-840D-EA52D5F57D3A}" srcId="{E3810C7A-162E-4F59-A5CC-D6E55AA7937F}" destId="{0EA86E49-E858-41CE-8D43-97A08FE90A37}" srcOrd="4" destOrd="0" parTransId="{6FB4378A-EEC9-461D-B415-84AD0E9053CE}" sibTransId="{5B545F06-B24E-44DD-A2DF-A45B35247BB4}"/>
+    <dgm:cxn modelId="{E6DF4253-D9EE-43EB-B6FB-A8D97546088E}" srcId="{E3810C7A-162E-4F59-A5CC-D6E55AA7937F}" destId="{966F4DBE-18B7-4C9E-B571-3C26A7DFEE84}" srcOrd="11" destOrd="0" parTransId="{7A4F4309-1991-4F78-A164-910218B0DB35}" sibTransId="{4C7B4F99-2B19-46BD-A4A9-4DE2A244C0F0}"/>
     <dgm:cxn modelId="{34256D54-45AA-46FD-AB7A-A5AECF0A9D0B}" srcId="{D262F73C-39B3-428F-9284-98725730645B}" destId="{AE8C7F3C-2450-4187-A834-B68CABF3EE22}" srcOrd="0" destOrd="0" parTransId="{57C43783-5699-4166-8CBD-DF5994280A83}" sibTransId="{B0BFD6F7-088D-4FEF-A0BE-9F7AFFE210A9}"/>
     <dgm:cxn modelId="{62E11E56-A2A1-4048-B8E1-9493A61A9913}" srcId="{6687B58C-7FED-4E13-8181-3B695C44E832}" destId="{CF0F09B6-A30D-43E6-93CC-ACC024D1B0A9}" srcOrd="0" destOrd="0" parTransId="{6730DA48-AEDC-46F9-ABFF-89F2C065A1A4}" sibTransId="{ADC532A4-8D48-46B3-982F-1581730D16BE}"/>
     <dgm:cxn modelId="{F920887D-AC4E-4EA3-8F11-92B5F202BCF0}" type="presOf" srcId="{D262F73C-39B3-428F-9284-98725730645B}" destId="{E47B67E0-569F-4426-9055-20FCEA9BC8D2}" srcOrd="0" destOrd="0" presId="urn:microsoft.com/office/officeart/2005/8/layout/vList5"/>
@@ -8779,62 +8990,76 @@
     <dgm:cxn modelId="{1A3E54A5-17A1-4C66-9387-C7412A2BC8A5}" type="presOf" srcId="{E3810C7A-162E-4F59-A5CC-D6E55AA7937F}" destId="{68768F37-E8AF-4175-AE5A-4F35AF491F27}" srcOrd="0" destOrd="0" presId="urn:microsoft.com/office/officeart/2005/8/layout/vList5"/>
     <dgm:cxn modelId="{1C7080AD-830B-4869-8452-F2BF1F8B821F}" srcId="{1AD8BBF2-5518-453B-A550-3E7FA8C485B6}" destId="{BC3AF494-F305-4FD5-B04B-EF9F61936E59}" srcOrd="0" destOrd="0" parTransId="{4F95183D-9451-469E-802D-9732DB828DAE}" sibTransId="{5E0E71AB-D653-4CBD-A1E3-4424370E2776}"/>
     <dgm:cxn modelId="{EDD3F3AE-EE41-4DEB-AFB6-561329F97565}" type="presOf" srcId="{CF0F09B6-A30D-43E6-93CC-ACC024D1B0A9}" destId="{6CDEE012-C9C5-4A17-838B-A6C32B86F9FD}" srcOrd="0" destOrd="0" presId="urn:microsoft.com/office/officeart/2005/8/layout/vList5"/>
-    <dgm:cxn modelId="{BD3D25B3-99C6-4215-923B-6D0617532C36}" srcId="{E3810C7A-162E-4F59-A5CC-D6E55AA7937F}" destId="{D262F73C-39B3-428F-9284-98725730645B}" srcOrd="1" destOrd="0" parTransId="{4C24E029-F73F-4B58-86D4-73606636BC2C}" sibTransId="{EB9EA278-CC09-426C-94E5-FB9705221FCB}"/>
-    <dgm:cxn modelId="{C267ECBD-6D04-4E58-85FE-14482FA6B4C3}" srcId="{E3810C7A-162E-4F59-A5CC-D6E55AA7937F}" destId="{185F8216-23A1-4FB2-B349-994231C46ED1}" srcOrd="10" destOrd="0" parTransId="{F5E831B0-572B-42CF-9B2A-7C1E40B8E350}" sibTransId="{8D884ED0-A294-4090-B0B1-4857BAEE060B}"/>
+    <dgm:cxn modelId="{BD3D25B3-99C6-4215-923B-6D0617532C36}" srcId="{E3810C7A-162E-4F59-A5CC-D6E55AA7937F}" destId="{D262F73C-39B3-428F-9284-98725730645B}" srcOrd="3" destOrd="0" parTransId="{4C24E029-F73F-4B58-86D4-73606636BC2C}" sibTransId="{EB9EA278-CC09-426C-94E5-FB9705221FCB}"/>
+    <dgm:cxn modelId="{FFD03AB4-9D43-438E-BA2C-929F25D73F62}" type="presOf" srcId="{D62B1B85-31BA-4EE1-A240-AA5907A9BE05}" destId="{AA1EB86B-5429-4533-8D79-C27F4A99378A}" srcOrd="0" destOrd="0" presId="urn:microsoft.com/office/officeart/2005/8/layout/vList5"/>
+    <dgm:cxn modelId="{FBAF89BB-E854-4D7D-ACDE-A0197FE0804C}" srcId="{E3810C7A-162E-4F59-A5CC-D6E55AA7937F}" destId="{93C5C6EE-232C-403A-8B36-B7247671CDED}" srcOrd="1" destOrd="0" parTransId="{9CFC9A54-5D6E-42AC-BCD6-EED4D6905AD6}" sibTransId="{7F38D61E-E8FD-47DB-A30F-798D40691C51}"/>
+    <dgm:cxn modelId="{C267ECBD-6D04-4E58-85FE-14482FA6B4C3}" srcId="{E3810C7A-162E-4F59-A5CC-D6E55AA7937F}" destId="{185F8216-23A1-4FB2-B349-994231C46ED1}" srcOrd="12" destOrd="0" parTransId="{F5E831B0-572B-42CF-9B2A-7C1E40B8E350}" sibTransId="{8D884ED0-A294-4090-B0B1-4857BAEE060B}"/>
+    <dgm:cxn modelId="{7AF29FC4-ED7F-48FE-B30E-46F1B763BB13}" type="presOf" srcId="{93C5C6EE-232C-403A-8B36-B7247671CDED}" destId="{8E67A5F0-22B8-4B96-8928-46D66946FFE1}" srcOrd="0" destOrd="0" presId="urn:microsoft.com/office/officeart/2005/8/layout/vList5"/>
     <dgm:cxn modelId="{38BC94CC-4EBC-4DEE-9E06-E223C5F2D7CF}" type="presOf" srcId="{966F4DBE-18B7-4C9E-B571-3C26A7DFEE84}" destId="{34510324-D802-4FC9-9901-97AFD6953F67}" srcOrd="0" destOrd="0" presId="urn:microsoft.com/office/officeart/2005/8/layout/vList5"/>
     <dgm:cxn modelId="{AA96E1D0-B982-4486-90BA-879C23B9A528}" type="presOf" srcId="{983C3A0F-4CC3-4C0C-BF60-57DF46D0D91F}" destId="{37DDD804-7468-4745-86EB-0ADFEB1882A6}" srcOrd="0" destOrd="0" presId="urn:microsoft.com/office/officeart/2005/8/layout/vList5"/>
     <dgm:cxn modelId="{6D313DD8-69CC-4B43-8276-9B3C695CC66F}" type="presOf" srcId="{AE8C7F3C-2450-4187-A834-B68CABF3EE22}" destId="{FAABE7F5-1683-464A-B4C4-5F4236F6AD44}" srcOrd="0" destOrd="0" presId="urn:microsoft.com/office/officeart/2005/8/layout/vList5"/>
     <dgm:cxn modelId="{76A80EDE-FC09-480F-9444-38E5F00F17E7}" type="presOf" srcId="{8E9A8F67-21C2-4DC7-93DE-83AB68EF939C}" destId="{15B1535D-7A2F-4187-BF40-F7B12325C164}" srcOrd="0" destOrd="0" presId="urn:microsoft.com/office/officeart/2005/8/layout/vList5"/>
     <dgm:cxn modelId="{81226EE0-1B86-4074-A319-5B71BB5273D0}" type="presOf" srcId="{1AD8BBF2-5518-453B-A550-3E7FA8C485B6}" destId="{0AE97034-2EEA-4546-B6E1-4FED6E26618F}" srcOrd="0" destOrd="0" presId="urn:microsoft.com/office/officeart/2005/8/layout/vList5"/>
-    <dgm:cxn modelId="{A7DB2FEA-1B14-423F-AC5D-A93828C4C428}" srcId="{E3810C7A-162E-4F59-A5CC-D6E55AA7937F}" destId="{983C3A0F-4CC3-4C0C-BF60-57DF46D0D91F}" srcOrd="6" destOrd="0" parTransId="{A991E67A-AD0B-443F-B7C9-390262482384}" sibTransId="{526F4B0F-6DD3-49A2-BE66-A78CA05C246E}"/>
+    <dgm:cxn modelId="{A7DB2FEA-1B14-423F-AC5D-A93828C4C428}" srcId="{E3810C7A-162E-4F59-A5CC-D6E55AA7937F}" destId="{983C3A0F-4CC3-4C0C-BF60-57DF46D0D91F}" srcOrd="8" destOrd="0" parTransId="{A991E67A-AD0B-443F-B7C9-390262482384}" sibTransId="{526F4B0F-6DD3-49A2-BE66-A78CA05C246E}"/>
     <dgm:cxn modelId="{3B5896EB-7F88-498E-98EC-0117E5A8A1F3}" type="presOf" srcId="{82E0C83C-052B-4AC6-A9A9-2C20F67A5624}" destId="{A66FD841-E172-4F54-A46D-4FEB62724531}" srcOrd="0" destOrd="0" presId="urn:microsoft.com/office/officeart/2005/8/layout/vList5"/>
+    <dgm:cxn modelId="{8A585BEF-658C-47E7-AD8C-8A6302D97B65}" type="presOf" srcId="{5688624E-314A-43A9-9E5F-69EBD853F1ED}" destId="{A74D09D0-1FCF-4852-A728-49E12CF054FF}" srcOrd="0" destOrd="0" presId="urn:microsoft.com/office/officeart/2005/8/layout/vList5"/>
     <dgm:cxn modelId="{AA03CDF1-F46F-457C-9510-B7C530776D2A}" srcId="{185F8216-23A1-4FB2-B349-994231C46ED1}" destId="{DA6687DC-701B-4988-BB1E-CC044E48B7C3}" srcOrd="0" destOrd="0" parTransId="{FBCB022D-F7DA-4589-AFF1-C1F134FA7602}" sibTransId="{816D2C10-F066-48C1-987D-6FD3BC108FED}"/>
+    <dgm:cxn modelId="{670D3BF2-06ED-494E-A16D-15FD922EE264}" type="presOf" srcId="{8C990D31-B23E-4C1C-B104-C3D2430CF29C}" destId="{9C0069D4-725E-4494-8846-60EDD57DC479}" srcOrd="0" destOrd="0" presId="urn:microsoft.com/office/officeart/2005/8/layout/vList5"/>
+    <dgm:cxn modelId="{E3548FF9-E41C-4346-809B-796832BB7166}" srcId="{5688624E-314A-43A9-9E5F-69EBD853F1ED}" destId="{8C990D31-B23E-4C1C-B104-C3D2430CF29C}" srcOrd="0" destOrd="0" parTransId="{950D44B6-6AC6-49C3-9B9F-7C0A25F57936}" sibTransId="{42FF957D-C254-4DD6-A6AB-46816857525C}"/>
     <dgm:cxn modelId="{F1BEF9F9-3A8B-4E85-A067-9F2631B7213F}" srcId="{91FE08E5-D0B0-4A32-AD9B-5986F438BA14}" destId="{ACEBF377-66AF-4F4E-93C6-C8C507EEADF4}" srcOrd="0" destOrd="0" parTransId="{2E4F8C34-6D0B-473E-8F20-FB332B780822}" sibTransId="{8665254A-79ED-4C61-BE91-A8DBE5DEB98C}"/>
     <dgm:cxn modelId="{9019FFFB-8304-459E-B26C-F1CDC08A57D9}" type="presOf" srcId="{ACEBF377-66AF-4F4E-93C6-C8C507EEADF4}" destId="{252247C1-1B56-4D8C-87FB-B27098B6AD39}" srcOrd="0" destOrd="0" presId="urn:microsoft.com/office/officeart/2005/8/layout/vList5"/>
     <dgm:cxn modelId="{E0E6BBFD-CAE5-428B-AB9C-41F6DCB75554}" type="presOf" srcId="{DA6687DC-701B-4988-BB1E-CC044E48B7C3}" destId="{A16281FF-B68A-4B29-9589-85A8639DAE3B}" srcOrd="0" destOrd="0" presId="urn:microsoft.com/office/officeart/2005/8/layout/vList5"/>
     <dgm:cxn modelId="{4AEC25FE-EDAA-42FD-BE29-097148484338}" type="presOf" srcId="{3BF2C142-4F28-4E87-9081-45691229DFC9}" destId="{6AB1550E-C385-4718-AB89-FF17CF59F285}" srcOrd="0" destOrd="0" presId="urn:microsoft.com/office/officeart/2005/8/layout/vList5"/>
     <dgm:cxn modelId="{E123C3FE-2DA5-4B4A-B207-2EBB836BF853}" type="presOf" srcId="{E7F86EF7-6DB4-4C76-8ED2-2F26C7863E76}" destId="{3BEDDF74-E637-43B3-8A8B-DFFFE1BF03F8}" srcOrd="0" destOrd="0" presId="urn:microsoft.com/office/officeart/2005/8/layout/vList5"/>
-    <dgm:cxn modelId="{D19194E5-96DA-4E3F-80F3-EE04FE24CA25}" type="presParOf" srcId="{68768F37-E8AF-4175-AE5A-4F35AF491F27}" destId="{4AD4B38E-16EB-4DE7-8482-A393A442B025}" srcOrd="0" destOrd="0" presId="urn:microsoft.com/office/officeart/2005/8/layout/vList5"/>
+    <dgm:cxn modelId="{017DA617-EBD8-4208-BFF5-D80D711BAB18}" type="presParOf" srcId="{68768F37-E8AF-4175-AE5A-4F35AF491F27}" destId="{5B98B960-2D3F-4127-A3AE-2A95F3F98B16}" srcOrd="0" destOrd="0" presId="urn:microsoft.com/office/officeart/2005/8/layout/vList5"/>
+    <dgm:cxn modelId="{60060D5F-B51E-4289-A4B2-A6FB445C1CF1}" type="presParOf" srcId="{5B98B960-2D3F-4127-A3AE-2A95F3F98B16}" destId="{A74D09D0-1FCF-4852-A728-49E12CF054FF}" srcOrd="0" destOrd="0" presId="urn:microsoft.com/office/officeart/2005/8/layout/vList5"/>
+    <dgm:cxn modelId="{5BE7FA9C-5251-4E73-A886-9210DD7E26F8}" type="presParOf" srcId="{5B98B960-2D3F-4127-A3AE-2A95F3F98B16}" destId="{9C0069D4-725E-4494-8846-60EDD57DC479}" srcOrd="1" destOrd="0" presId="urn:microsoft.com/office/officeart/2005/8/layout/vList5"/>
+    <dgm:cxn modelId="{FF0B4C2B-7A0D-414F-9F11-B9CB6A11AA2B}" type="presParOf" srcId="{68768F37-E8AF-4175-AE5A-4F35AF491F27}" destId="{78CFA5F1-AD3F-46D5-8863-70C2A2C9750F}" srcOrd="1" destOrd="0" presId="urn:microsoft.com/office/officeart/2005/8/layout/vList5"/>
+    <dgm:cxn modelId="{D07BAB0E-0DB8-4444-9D8E-E37260F9DDC1}" type="presParOf" srcId="{68768F37-E8AF-4175-AE5A-4F35AF491F27}" destId="{8A95F0A6-F46F-4881-840D-899EB4DBA6BD}" srcOrd="2" destOrd="0" presId="urn:microsoft.com/office/officeart/2005/8/layout/vList5"/>
+    <dgm:cxn modelId="{DD261989-D25F-4AD3-8D4B-8CB63C8E3AA4}" type="presParOf" srcId="{8A95F0A6-F46F-4881-840D-899EB4DBA6BD}" destId="{8E67A5F0-22B8-4B96-8928-46D66946FFE1}" srcOrd="0" destOrd="0" presId="urn:microsoft.com/office/officeart/2005/8/layout/vList5"/>
+    <dgm:cxn modelId="{8C89F322-4845-49F1-A35C-73BBE2A6E6C0}" type="presParOf" srcId="{8A95F0A6-F46F-4881-840D-899EB4DBA6BD}" destId="{AA1EB86B-5429-4533-8D79-C27F4A99378A}" srcOrd="1" destOrd="0" presId="urn:microsoft.com/office/officeart/2005/8/layout/vList5"/>
+    <dgm:cxn modelId="{35DF2524-8880-4C42-99EB-B66794ED0FCA}" type="presParOf" srcId="{68768F37-E8AF-4175-AE5A-4F35AF491F27}" destId="{F0E5F50B-D116-4084-B71A-8A921884B6AC}" srcOrd="3" destOrd="0" presId="urn:microsoft.com/office/officeart/2005/8/layout/vList5"/>
+    <dgm:cxn modelId="{D19194E5-96DA-4E3F-80F3-EE04FE24CA25}" type="presParOf" srcId="{68768F37-E8AF-4175-AE5A-4F35AF491F27}" destId="{4AD4B38E-16EB-4DE7-8482-A393A442B025}" srcOrd="4" destOrd="0" presId="urn:microsoft.com/office/officeart/2005/8/layout/vList5"/>
     <dgm:cxn modelId="{2323C9A9-DA47-4FA8-B881-61C77C9A37DF}" type="presParOf" srcId="{4AD4B38E-16EB-4DE7-8482-A393A442B025}" destId="{F12FCF34-9E88-4F3C-B75C-BD6AE8E40F6E}" srcOrd="0" destOrd="0" presId="urn:microsoft.com/office/officeart/2005/8/layout/vList5"/>
     <dgm:cxn modelId="{E1CEB628-4DFC-4A09-BCE4-6ADAEC075FCC}" type="presParOf" srcId="{4AD4B38E-16EB-4DE7-8482-A393A442B025}" destId="{252247C1-1B56-4D8C-87FB-B27098B6AD39}" srcOrd="1" destOrd="0" presId="urn:microsoft.com/office/officeart/2005/8/layout/vList5"/>
-    <dgm:cxn modelId="{5057F887-3DF8-456E-A31D-6CFD1136D337}" type="presParOf" srcId="{68768F37-E8AF-4175-AE5A-4F35AF491F27}" destId="{C368BBDB-D78D-47D2-A6C1-9E56E8653D38}" srcOrd="1" destOrd="0" presId="urn:microsoft.com/office/officeart/2005/8/layout/vList5"/>
-    <dgm:cxn modelId="{A060FD90-41F1-41D2-9A12-5961B70DAA9E}" type="presParOf" srcId="{68768F37-E8AF-4175-AE5A-4F35AF491F27}" destId="{70EB74FD-6914-435D-88CA-4005C81CB03C}" srcOrd="2" destOrd="0" presId="urn:microsoft.com/office/officeart/2005/8/layout/vList5"/>
+    <dgm:cxn modelId="{5057F887-3DF8-456E-A31D-6CFD1136D337}" type="presParOf" srcId="{68768F37-E8AF-4175-AE5A-4F35AF491F27}" destId="{C368BBDB-D78D-47D2-A6C1-9E56E8653D38}" srcOrd="5" destOrd="0" presId="urn:microsoft.com/office/officeart/2005/8/layout/vList5"/>
+    <dgm:cxn modelId="{A060FD90-41F1-41D2-9A12-5961B70DAA9E}" type="presParOf" srcId="{68768F37-E8AF-4175-AE5A-4F35AF491F27}" destId="{70EB74FD-6914-435D-88CA-4005C81CB03C}" srcOrd="6" destOrd="0" presId="urn:microsoft.com/office/officeart/2005/8/layout/vList5"/>
     <dgm:cxn modelId="{FA99B8DB-0BF6-4530-B208-62D2F7023744}" type="presParOf" srcId="{70EB74FD-6914-435D-88CA-4005C81CB03C}" destId="{E47B67E0-569F-4426-9055-20FCEA9BC8D2}" srcOrd="0" destOrd="0" presId="urn:microsoft.com/office/officeart/2005/8/layout/vList5"/>
     <dgm:cxn modelId="{4B2CC3B6-BC0D-457D-9C07-8317AB90A4F1}" type="presParOf" srcId="{70EB74FD-6914-435D-88CA-4005C81CB03C}" destId="{FAABE7F5-1683-464A-B4C4-5F4236F6AD44}" srcOrd="1" destOrd="0" presId="urn:microsoft.com/office/officeart/2005/8/layout/vList5"/>
-    <dgm:cxn modelId="{5894304D-E139-4A52-A603-52F07CDFF8B6}" type="presParOf" srcId="{68768F37-E8AF-4175-AE5A-4F35AF491F27}" destId="{49BD7EF0-0B4B-4D3D-B684-4AC47BFEA5BE}" srcOrd="3" destOrd="0" presId="urn:microsoft.com/office/officeart/2005/8/layout/vList5"/>
-    <dgm:cxn modelId="{5A1AB898-5252-4B11-9CAD-696A16AD2119}" type="presParOf" srcId="{68768F37-E8AF-4175-AE5A-4F35AF491F27}" destId="{4412F307-CD0B-43FF-A78B-5B7C0E0C3DEF}" srcOrd="4" destOrd="0" presId="urn:microsoft.com/office/officeart/2005/8/layout/vList5"/>
+    <dgm:cxn modelId="{5894304D-E139-4A52-A603-52F07CDFF8B6}" type="presParOf" srcId="{68768F37-E8AF-4175-AE5A-4F35AF491F27}" destId="{49BD7EF0-0B4B-4D3D-B684-4AC47BFEA5BE}" srcOrd="7" destOrd="0" presId="urn:microsoft.com/office/officeart/2005/8/layout/vList5"/>
+    <dgm:cxn modelId="{5A1AB898-5252-4B11-9CAD-696A16AD2119}" type="presParOf" srcId="{68768F37-E8AF-4175-AE5A-4F35AF491F27}" destId="{4412F307-CD0B-43FF-A78B-5B7C0E0C3DEF}" srcOrd="8" destOrd="0" presId="urn:microsoft.com/office/officeart/2005/8/layout/vList5"/>
     <dgm:cxn modelId="{75C8506D-69AB-46E5-B37C-E33ABE67BA39}" type="presParOf" srcId="{4412F307-CD0B-43FF-A78B-5B7C0E0C3DEF}" destId="{7ED2616D-3965-4CD9-BF4D-6CDCBBA52BAC}" srcOrd="0" destOrd="0" presId="urn:microsoft.com/office/officeart/2005/8/layout/vList5"/>
     <dgm:cxn modelId="{FE0EB6B0-4423-47A4-84B3-1B77389C8A74}" type="presParOf" srcId="{4412F307-CD0B-43FF-A78B-5B7C0E0C3DEF}" destId="{6AB1550E-C385-4718-AB89-FF17CF59F285}" srcOrd="1" destOrd="0" presId="urn:microsoft.com/office/officeart/2005/8/layout/vList5"/>
-    <dgm:cxn modelId="{578F5AE3-E96B-46CA-9706-F54E1BACEC0F}" type="presParOf" srcId="{68768F37-E8AF-4175-AE5A-4F35AF491F27}" destId="{3B05BAB9-95E3-473B-B981-779D1DB6C606}" srcOrd="5" destOrd="0" presId="urn:microsoft.com/office/officeart/2005/8/layout/vList5"/>
-    <dgm:cxn modelId="{3032237A-0765-4D4C-A857-6F27BECE4ABC}" type="presParOf" srcId="{68768F37-E8AF-4175-AE5A-4F35AF491F27}" destId="{57A39BB0-8133-498C-AA28-169B693AC808}" srcOrd="6" destOrd="0" presId="urn:microsoft.com/office/officeart/2005/8/layout/vList5"/>
+    <dgm:cxn modelId="{578F5AE3-E96B-46CA-9706-F54E1BACEC0F}" type="presParOf" srcId="{68768F37-E8AF-4175-AE5A-4F35AF491F27}" destId="{3B05BAB9-95E3-473B-B981-779D1DB6C606}" srcOrd="9" destOrd="0" presId="urn:microsoft.com/office/officeart/2005/8/layout/vList5"/>
+    <dgm:cxn modelId="{3032237A-0765-4D4C-A857-6F27BECE4ABC}" type="presParOf" srcId="{68768F37-E8AF-4175-AE5A-4F35AF491F27}" destId="{57A39BB0-8133-498C-AA28-169B693AC808}" srcOrd="10" destOrd="0" presId="urn:microsoft.com/office/officeart/2005/8/layout/vList5"/>
     <dgm:cxn modelId="{6F0923E4-E13C-4F57-B3A5-E00FCE91658E}" type="presParOf" srcId="{57A39BB0-8133-498C-AA28-169B693AC808}" destId="{D50219D7-709A-4BEC-B02B-FACFFE1B4F1E}" srcOrd="0" destOrd="0" presId="urn:microsoft.com/office/officeart/2005/8/layout/vList5"/>
     <dgm:cxn modelId="{7D1043AD-DE80-47F1-9D2A-15F9C1784512}" type="presParOf" srcId="{57A39BB0-8133-498C-AA28-169B693AC808}" destId="{3BEDDF74-E637-43B3-8A8B-DFFFE1BF03F8}" srcOrd="1" destOrd="0" presId="urn:microsoft.com/office/officeart/2005/8/layout/vList5"/>
-    <dgm:cxn modelId="{B9D4F900-A3E8-412E-AE86-9DB24F55E558}" type="presParOf" srcId="{68768F37-E8AF-4175-AE5A-4F35AF491F27}" destId="{E1975D3A-0C31-4F0A-A630-B9D9AEDDBB97}" srcOrd="7" destOrd="0" presId="urn:microsoft.com/office/officeart/2005/8/layout/vList5"/>
-    <dgm:cxn modelId="{C5F574BC-6DB0-44AC-93DE-4602C0139D64}" type="presParOf" srcId="{68768F37-E8AF-4175-AE5A-4F35AF491F27}" destId="{8B61C97A-211F-43CC-858B-F4955626F216}" srcOrd="8" destOrd="0" presId="urn:microsoft.com/office/officeart/2005/8/layout/vList5"/>
+    <dgm:cxn modelId="{B9D4F900-A3E8-412E-AE86-9DB24F55E558}" type="presParOf" srcId="{68768F37-E8AF-4175-AE5A-4F35AF491F27}" destId="{E1975D3A-0C31-4F0A-A630-B9D9AEDDBB97}" srcOrd="11" destOrd="0" presId="urn:microsoft.com/office/officeart/2005/8/layout/vList5"/>
+    <dgm:cxn modelId="{C5F574BC-6DB0-44AC-93DE-4602C0139D64}" type="presParOf" srcId="{68768F37-E8AF-4175-AE5A-4F35AF491F27}" destId="{8B61C97A-211F-43CC-858B-F4955626F216}" srcOrd="12" destOrd="0" presId="urn:microsoft.com/office/officeart/2005/8/layout/vList5"/>
     <dgm:cxn modelId="{60B89C41-2A3A-4932-8B20-49442B314A73}" type="presParOf" srcId="{8B61C97A-211F-43CC-858B-F4955626F216}" destId="{0AE97034-2EEA-4546-B6E1-4FED6E26618F}" srcOrd="0" destOrd="0" presId="urn:microsoft.com/office/officeart/2005/8/layout/vList5"/>
     <dgm:cxn modelId="{A09F8BA9-ED64-47CC-8F7E-9D1A89A5B764}" type="presParOf" srcId="{8B61C97A-211F-43CC-858B-F4955626F216}" destId="{8D19A966-B752-413D-884D-47C9FC61B37F}" srcOrd="1" destOrd="0" presId="urn:microsoft.com/office/officeart/2005/8/layout/vList5"/>
-    <dgm:cxn modelId="{37D5359F-48BE-4E31-A843-2929AFFC4CF3}" type="presParOf" srcId="{68768F37-E8AF-4175-AE5A-4F35AF491F27}" destId="{05D627BE-D8E1-4913-B69F-10D01221A230}" srcOrd="9" destOrd="0" presId="urn:microsoft.com/office/officeart/2005/8/layout/vList5"/>
-    <dgm:cxn modelId="{A89DC851-7F21-444C-8F24-912B65E4DC45}" type="presParOf" srcId="{68768F37-E8AF-4175-AE5A-4F35AF491F27}" destId="{7659B1DD-86C0-43F6-8756-E9AFE76A6532}" srcOrd="10" destOrd="0" presId="urn:microsoft.com/office/officeart/2005/8/layout/vList5"/>
+    <dgm:cxn modelId="{37D5359F-48BE-4E31-A843-2929AFFC4CF3}" type="presParOf" srcId="{68768F37-E8AF-4175-AE5A-4F35AF491F27}" destId="{05D627BE-D8E1-4913-B69F-10D01221A230}" srcOrd="13" destOrd="0" presId="urn:microsoft.com/office/officeart/2005/8/layout/vList5"/>
+    <dgm:cxn modelId="{A89DC851-7F21-444C-8F24-912B65E4DC45}" type="presParOf" srcId="{68768F37-E8AF-4175-AE5A-4F35AF491F27}" destId="{7659B1DD-86C0-43F6-8756-E9AFE76A6532}" srcOrd="14" destOrd="0" presId="urn:microsoft.com/office/officeart/2005/8/layout/vList5"/>
     <dgm:cxn modelId="{B1A67546-689A-4042-9392-E47CEEFEEA2C}" type="presParOf" srcId="{7659B1DD-86C0-43F6-8756-E9AFE76A6532}" destId="{420DC76F-67CB-4E7F-B46E-2E6148ED358C}" srcOrd="0" destOrd="0" presId="urn:microsoft.com/office/officeart/2005/8/layout/vList5"/>
     <dgm:cxn modelId="{DA055496-CE6E-4B35-92DF-0086560972E6}" type="presParOf" srcId="{7659B1DD-86C0-43F6-8756-E9AFE76A6532}" destId="{6CDEE012-C9C5-4A17-838B-A6C32B86F9FD}" srcOrd="1" destOrd="0" presId="urn:microsoft.com/office/officeart/2005/8/layout/vList5"/>
-    <dgm:cxn modelId="{A7D4E787-3E21-499C-9A5C-B213442EB9A6}" type="presParOf" srcId="{68768F37-E8AF-4175-AE5A-4F35AF491F27}" destId="{33B6A121-0C7D-4E4B-A4EE-AC006BC16A93}" srcOrd="11" destOrd="0" presId="urn:microsoft.com/office/officeart/2005/8/layout/vList5"/>
-    <dgm:cxn modelId="{930344A9-B4D9-45EB-B432-1BAA2EB74D19}" type="presParOf" srcId="{68768F37-E8AF-4175-AE5A-4F35AF491F27}" destId="{F006D19A-3104-4C63-A9DA-B9E49927076D}" srcOrd="12" destOrd="0" presId="urn:microsoft.com/office/officeart/2005/8/layout/vList5"/>
+    <dgm:cxn modelId="{A7D4E787-3E21-499C-9A5C-B213442EB9A6}" type="presParOf" srcId="{68768F37-E8AF-4175-AE5A-4F35AF491F27}" destId="{33B6A121-0C7D-4E4B-A4EE-AC006BC16A93}" srcOrd="15" destOrd="0" presId="urn:microsoft.com/office/officeart/2005/8/layout/vList5"/>
+    <dgm:cxn modelId="{930344A9-B4D9-45EB-B432-1BAA2EB74D19}" type="presParOf" srcId="{68768F37-E8AF-4175-AE5A-4F35AF491F27}" destId="{F006D19A-3104-4C63-A9DA-B9E49927076D}" srcOrd="16" destOrd="0" presId="urn:microsoft.com/office/officeart/2005/8/layout/vList5"/>
     <dgm:cxn modelId="{F69F32F8-AB3D-40DE-B4C8-2345D28363EF}" type="presParOf" srcId="{F006D19A-3104-4C63-A9DA-B9E49927076D}" destId="{37DDD804-7468-4745-86EB-0ADFEB1882A6}" srcOrd="0" destOrd="0" presId="urn:microsoft.com/office/officeart/2005/8/layout/vList5"/>
     <dgm:cxn modelId="{9AA798FD-BA09-428C-8B46-4B3FCC109E87}" type="presParOf" srcId="{F006D19A-3104-4C63-A9DA-B9E49927076D}" destId="{11A37157-747C-4EF9-86E3-7060FDB3EDCF}" srcOrd="1" destOrd="0" presId="urn:microsoft.com/office/officeart/2005/8/layout/vList5"/>
-    <dgm:cxn modelId="{9788186E-BD12-4F43-8E41-CF027BB00F73}" type="presParOf" srcId="{68768F37-E8AF-4175-AE5A-4F35AF491F27}" destId="{11B91D39-325A-47B8-85EA-460A59624191}" srcOrd="13" destOrd="0" presId="urn:microsoft.com/office/officeart/2005/8/layout/vList5"/>
-    <dgm:cxn modelId="{D11BB04E-1E27-4062-9FCB-4007A56F3BDF}" type="presParOf" srcId="{68768F37-E8AF-4175-AE5A-4F35AF491F27}" destId="{371D014F-7818-4FED-AD98-CDAB06350D8B}" srcOrd="14" destOrd="0" presId="urn:microsoft.com/office/officeart/2005/8/layout/vList5"/>
+    <dgm:cxn modelId="{9788186E-BD12-4F43-8E41-CF027BB00F73}" type="presParOf" srcId="{68768F37-E8AF-4175-AE5A-4F35AF491F27}" destId="{11B91D39-325A-47B8-85EA-460A59624191}" srcOrd="17" destOrd="0" presId="urn:microsoft.com/office/officeart/2005/8/layout/vList5"/>
+    <dgm:cxn modelId="{D11BB04E-1E27-4062-9FCB-4007A56F3BDF}" type="presParOf" srcId="{68768F37-E8AF-4175-AE5A-4F35AF491F27}" destId="{371D014F-7818-4FED-AD98-CDAB06350D8B}" srcOrd="18" destOrd="0" presId="urn:microsoft.com/office/officeart/2005/8/layout/vList5"/>
     <dgm:cxn modelId="{48FF7B74-1863-4C64-9D6F-CBC2F1473ECF}" type="presParOf" srcId="{371D014F-7818-4FED-AD98-CDAB06350D8B}" destId="{15B1535D-7A2F-4187-BF40-F7B12325C164}" srcOrd="0" destOrd="0" presId="urn:microsoft.com/office/officeart/2005/8/layout/vList5"/>
     <dgm:cxn modelId="{5FECEBA9-962F-44E3-A53C-9935E6DB51B2}" type="presParOf" srcId="{371D014F-7818-4FED-AD98-CDAB06350D8B}" destId="{70E40ED8-44BE-430D-B675-928F3AAF69F6}" srcOrd="1" destOrd="0" presId="urn:microsoft.com/office/officeart/2005/8/layout/vList5"/>
-    <dgm:cxn modelId="{6CF4CCFF-D966-4DD5-B59C-FE4EBE2B82D5}" type="presParOf" srcId="{68768F37-E8AF-4175-AE5A-4F35AF491F27}" destId="{B91562B5-AAC5-49AA-AE45-896A131D0023}" srcOrd="15" destOrd="0" presId="urn:microsoft.com/office/officeart/2005/8/layout/vList5"/>
-    <dgm:cxn modelId="{0532FD96-83ED-4BCC-AFC5-70DC371981E8}" type="presParOf" srcId="{68768F37-E8AF-4175-AE5A-4F35AF491F27}" destId="{DC6BB8BD-8D2C-4B08-92FA-62CB87045263}" srcOrd="16" destOrd="0" presId="urn:microsoft.com/office/officeart/2005/8/layout/vList5"/>
+    <dgm:cxn modelId="{6CF4CCFF-D966-4DD5-B59C-FE4EBE2B82D5}" type="presParOf" srcId="{68768F37-E8AF-4175-AE5A-4F35AF491F27}" destId="{B91562B5-AAC5-49AA-AE45-896A131D0023}" srcOrd="19" destOrd="0" presId="urn:microsoft.com/office/officeart/2005/8/layout/vList5"/>
+    <dgm:cxn modelId="{0532FD96-83ED-4BCC-AFC5-70DC371981E8}" type="presParOf" srcId="{68768F37-E8AF-4175-AE5A-4F35AF491F27}" destId="{DC6BB8BD-8D2C-4B08-92FA-62CB87045263}" srcOrd="20" destOrd="0" presId="urn:microsoft.com/office/officeart/2005/8/layout/vList5"/>
     <dgm:cxn modelId="{4DB9BADB-462A-4C8D-BCAB-5CE50AD06D8F}" type="presParOf" srcId="{DC6BB8BD-8D2C-4B08-92FA-62CB87045263}" destId="{1DD2327A-0023-43BD-AE1D-76839AC91220}" srcOrd="0" destOrd="0" presId="urn:microsoft.com/office/officeart/2005/8/layout/vList5"/>
     <dgm:cxn modelId="{077EE67C-DD5E-499D-A2C0-3BA2A1BF06F7}" type="presParOf" srcId="{DC6BB8BD-8D2C-4B08-92FA-62CB87045263}" destId="{A66FD841-E172-4F54-A46D-4FEB62724531}" srcOrd="1" destOrd="0" presId="urn:microsoft.com/office/officeart/2005/8/layout/vList5"/>
-    <dgm:cxn modelId="{2D7E4484-B9F0-4073-83F8-99DAC6B33B9C}" type="presParOf" srcId="{68768F37-E8AF-4175-AE5A-4F35AF491F27}" destId="{295A0221-CC3F-49AC-BF83-475100CFBFE3}" srcOrd="17" destOrd="0" presId="urn:microsoft.com/office/officeart/2005/8/layout/vList5"/>
-    <dgm:cxn modelId="{7DC4E693-F191-4CD7-8E8E-E5D7397D9A06}" type="presParOf" srcId="{68768F37-E8AF-4175-AE5A-4F35AF491F27}" destId="{FB7A206E-7E3B-462F-AC23-30C2571DB0C3}" srcOrd="18" destOrd="0" presId="urn:microsoft.com/office/officeart/2005/8/layout/vList5"/>
+    <dgm:cxn modelId="{2D7E4484-B9F0-4073-83F8-99DAC6B33B9C}" type="presParOf" srcId="{68768F37-E8AF-4175-AE5A-4F35AF491F27}" destId="{295A0221-CC3F-49AC-BF83-475100CFBFE3}" srcOrd="21" destOrd="0" presId="urn:microsoft.com/office/officeart/2005/8/layout/vList5"/>
+    <dgm:cxn modelId="{7DC4E693-F191-4CD7-8E8E-E5D7397D9A06}" type="presParOf" srcId="{68768F37-E8AF-4175-AE5A-4F35AF491F27}" destId="{FB7A206E-7E3B-462F-AC23-30C2571DB0C3}" srcOrd="22" destOrd="0" presId="urn:microsoft.com/office/officeart/2005/8/layout/vList5"/>
     <dgm:cxn modelId="{A143D239-D44E-4E94-A57F-153E8CA454C9}" type="presParOf" srcId="{FB7A206E-7E3B-462F-AC23-30C2571DB0C3}" destId="{34510324-D802-4FC9-9901-97AFD6953F67}" srcOrd="0" destOrd="0" presId="urn:microsoft.com/office/officeart/2005/8/layout/vList5"/>
     <dgm:cxn modelId="{CEB23AE9-40A0-4282-B4D6-5B8E5FBDC872}" type="presParOf" srcId="{FB7A206E-7E3B-462F-AC23-30C2571DB0C3}" destId="{584C82D3-8114-4ECC-ACD2-0C383433147E}" srcOrd="1" destOrd="0" presId="urn:microsoft.com/office/officeart/2005/8/layout/vList5"/>
-    <dgm:cxn modelId="{E8C20AF7-438A-4D4B-908C-D10C7AF97439}" type="presParOf" srcId="{68768F37-E8AF-4175-AE5A-4F35AF491F27}" destId="{44C143E0-6F71-4274-9076-D8124C48095E}" srcOrd="19" destOrd="0" presId="urn:microsoft.com/office/officeart/2005/8/layout/vList5"/>
-    <dgm:cxn modelId="{8CD42EE4-0796-4D69-B1A0-FA641B8428D0}" type="presParOf" srcId="{68768F37-E8AF-4175-AE5A-4F35AF491F27}" destId="{64E37F42-7A59-4440-8534-1517B5C1CBBA}" srcOrd="20" destOrd="0" presId="urn:microsoft.com/office/officeart/2005/8/layout/vList5"/>
+    <dgm:cxn modelId="{E8C20AF7-438A-4D4B-908C-D10C7AF97439}" type="presParOf" srcId="{68768F37-E8AF-4175-AE5A-4F35AF491F27}" destId="{44C143E0-6F71-4274-9076-D8124C48095E}" srcOrd="23" destOrd="0" presId="urn:microsoft.com/office/officeart/2005/8/layout/vList5"/>
+    <dgm:cxn modelId="{8CD42EE4-0796-4D69-B1A0-FA641B8428D0}" type="presParOf" srcId="{68768F37-E8AF-4175-AE5A-4F35AF491F27}" destId="{64E37F42-7A59-4440-8534-1517B5C1CBBA}" srcOrd="24" destOrd="0" presId="urn:microsoft.com/office/officeart/2005/8/layout/vList5"/>
     <dgm:cxn modelId="{CE0D718C-2833-4AD6-8CF6-05D0D6AEC973}" type="presParOf" srcId="{64E37F42-7A59-4440-8534-1517B5C1CBBA}" destId="{6A499025-F9DF-477C-8373-2FD3C48E42CD}" srcOrd="0" destOrd="0" presId="urn:microsoft.com/office/officeart/2005/8/layout/vList5"/>
     <dgm:cxn modelId="{7A4A9B23-72DF-435C-A247-8C5AE1EB13AE}" type="presParOf" srcId="{64E37F42-7A59-4440-8534-1517B5C1CBBA}" destId="{A16281FF-B68A-4B29-9589-85A8639DAE3B}" srcOrd="1" destOrd="0" presId="urn:microsoft.com/office/officeart/2005/8/layout/vList5"/>
   </dgm:cxnLst>
@@ -12740,15 +12965,15 @@
       <dsp:cNvGrpSpPr/>
     </dsp:nvGrpSpPr>
     <dsp:grpSpPr/>
-    <dsp:sp modelId="{252247C1-1B56-4D8C-87FB-B27098B6AD39}">
+    <dsp:sp modelId="{9C0069D4-725E-4494-8846-60EDD57DC479}">
       <dsp:nvSpPr>
         <dsp:cNvPr id="0" name=""/>
         <dsp:cNvSpPr/>
       </dsp:nvSpPr>
       <dsp:spPr>
         <a:xfrm rot="5400000">
-          <a:off x="6999331" y="-3174833"/>
-          <a:ext cx="302553" cy="6729984"/>
+          <a:off x="7022702" y="-3203835"/>
+          <a:ext cx="255811" cy="6729984"/>
         </a:xfrm>
         <a:prstGeom prst="round2SameRect">
           <a:avLst/>
@@ -12792,12 +13017,12 @@
         <a:fontRef idx="minor"/>
       </dsp:style>
       <dsp:txBody>
-        <a:bodyPr spcFirstLastPara="0" vert="horz" wrap="square" lIns="57150" tIns="28575" rIns="57150" bIns="28575" numCol="1" spcCol="1270" anchor="ctr" anchorCtr="0">
+        <a:bodyPr spcFirstLastPara="0" vert="horz" wrap="square" lIns="45720" tIns="22860" rIns="45720" bIns="22860" numCol="1" spcCol="1270" anchor="ctr" anchorCtr="0">
           <a:noAutofit/>
         </a:bodyPr>
         <a:lstStyle/>
         <a:p>
-          <a:pPr marL="114300" lvl="1" indent="-114300" algn="l" defTabSz="666750">
+          <a:pPr marL="114300" lvl="1" indent="-114300" algn="l" defTabSz="533400">
             <a:lnSpc>
               <a:spcPct val="90000"/>
             </a:lnSpc>
@@ -12810,25 +13035,25 @@
             <a:buChar char="•"/>
           </a:pPr>
           <a:r>
-            <a:rPr lang="en-US" sz="1500" kern="1200" dirty="0"/>
+            <a:rPr lang="en-US" sz="1200" kern="1200" dirty="0"/>
             <a:t>If tissue is present = 1, if tissue is absent = 0 </a:t>
           </a:r>
         </a:p>
       </dsp:txBody>
       <dsp:txXfrm rot="-5400000">
-        <a:off x="3785616" y="53651"/>
-        <a:ext cx="6715215" cy="273015"/>
+        <a:off x="3785616" y="45739"/>
+        <a:ext cx="6717496" cy="230835"/>
       </dsp:txXfrm>
     </dsp:sp>
-    <dsp:sp modelId="{F12FCF34-9E88-4F3C-B75C-BD6AE8E40F6E}">
+    <dsp:sp modelId="{A74D09D0-1FCF-4852-A728-49E12CF054FF}">
       <dsp:nvSpPr>
         <dsp:cNvPr id="0" name=""/>
         <dsp:cNvSpPr/>
       </dsp:nvSpPr>
       <dsp:spPr>
         <a:xfrm>
-          <a:off x="0" y="1062"/>
-          <a:ext cx="3785616" cy="378192"/>
+          <a:off x="0" y="1274"/>
+          <a:ext cx="3785616" cy="319763"/>
         </a:xfrm>
         <a:prstGeom prst="roundRect">
           <a:avLst/>
@@ -12870,12 +13095,12 @@
         </a:fontRef>
       </dsp:style>
       <dsp:txBody>
-        <a:bodyPr spcFirstLastPara="0" vert="horz" wrap="square" lIns="72390" tIns="36195" rIns="72390" bIns="36195" numCol="1" spcCol="1270" anchor="ctr" anchorCtr="0">
+        <a:bodyPr spcFirstLastPara="0" vert="horz" wrap="square" lIns="60960" tIns="30480" rIns="60960" bIns="30480" numCol="1" spcCol="1270" anchor="ctr" anchorCtr="0">
           <a:noAutofit/>
         </a:bodyPr>
         <a:lstStyle/>
         <a:p>
-          <a:pPr marL="0" lvl="0" indent="0" algn="ctr" defTabSz="844550">
+          <a:pPr marL="0" lvl="0" indent="0" algn="ctr" defTabSz="711200">
             <a:lnSpc>
               <a:spcPct val="90000"/>
             </a:lnSpc>
@@ -12888,25 +13113,25 @@
             <a:buNone/>
           </a:pPr>
           <a:r>
-            <a:rPr lang="en-US" sz="1900" kern="1200" dirty="0"/>
-            <a:t>10</a:t>
+            <a:rPr lang="en-US" sz="1600" kern="1200" dirty="0"/>
+            <a:t>12</a:t>
           </a:r>
         </a:p>
       </dsp:txBody>
       <dsp:txXfrm>
-        <a:off x="18462" y="19524"/>
-        <a:ext cx="3748692" cy="341268"/>
+        <a:off x="15610" y="16884"/>
+        <a:ext cx="3754396" cy="288543"/>
       </dsp:txXfrm>
     </dsp:sp>
-    <dsp:sp modelId="{FAABE7F5-1683-464A-B4C4-5F4236F6AD44}">
+    <dsp:sp modelId="{AA1EB86B-5429-4533-8D79-C27F4A99378A}">
       <dsp:nvSpPr>
         <dsp:cNvPr id="0" name=""/>
         <dsp:cNvSpPr/>
       </dsp:nvSpPr>
       <dsp:spPr>
         <a:xfrm rot="5400000">
-          <a:off x="6999331" y="-2777731"/>
-          <a:ext cx="302553" cy="6729984"/>
+          <a:off x="7022702" y="-2868083"/>
+          <a:ext cx="255811" cy="6729984"/>
         </a:xfrm>
         <a:prstGeom prst="round2SameRect">
           <a:avLst/>
@@ -12950,12 +13175,12 @@
         <a:fontRef idx="minor"/>
       </dsp:style>
       <dsp:txBody>
-        <a:bodyPr spcFirstLastPara="0" vert="horz" wrap="square" lIns="57150" tIns="28575" rIns="57150" bIns="28575" numCol="1" spcCol="1270" anchor="ctr" anchorCtr="0">
+        <a:bodyPr spcFirstLastPara="0" vert="horz" wrap="square" lIns="45720" tIns="22860" rIns="45720" bIns="22860" numCol="1" spcCol="1270" anchor="ctr" anchorCtr="0">
           <a:noAutofit/>
         </a:bodyPr>
         <a:lstStyle/>
         <a:p>
-          <a:pPr marL="114300" lvl="1" indent="-114300" algn="l" defTabSz="666750">
+          <a:pPr marL="114300" lvl="1" indent="-114300" algn="l" defTabSz="533400">
             <a:lnSpc>
               <a:spcPct val="90000"/>
             </a:lnSpc>
@@ -12968,25 +13193,25 @@
             <a:buChar char="•"/>
           </a:pPr>
           <a:r>
-            <a:rPr lang="en-US" sz="1500" kern="1200" dirty="0"/>
+            <a:rPr lang="en-US" sz="1200" kern="1200" dirty="0"/>
             <a:t>Number Z slices A647 with depth of focus step sizes</a:t>
           </a:r>
         </a:p>
       </dsp:txBody>
       <dsp:txXfrm rot="-5400000">
-        <a:off x="3785616" y="450753"/>
-        <a:ext cx="6715215" cy="273015"/>
+        <a:off x="3785616" y="381491"/>
+        <a:ext cx="6717496" cy="230835"/>
       </dsp:txXfrm>
     </dsp:sp>
-    <dsp:sp modelId="{E47B67E0-569F-4426-9055-20FCEA9BC8D2}">
+    <dsp:sp modelId="{8E67A5F0-22B8-4B96-8928-46D66946FFE1}">
       <dsp:nvSpPr>
         <dsp:cNvPr id="0" name=""/>
         <dsp:cNvSpPr/>
       </dsp:nvSpPr>
       <dsp:spPr>
         <a:xfrm>
-          <a:off x="0" y="398164"/>
-          <a:ext cx="3785616" cy="378192"/>
+          <a:off x="0" y="337026"/>
+          <a:ext cx="3785616" cy="319763"/>
         </a:xfrm>
         <a:prstGeom prst="roundRect">
           <a:avLst/>
@@ -13028,12 +13253,12 @@
         </a:fontRef>
       </dsp:style>
       <dsp:txBody>
-        <a:bodyPr spcFirstLastPara="0" vert="horz" wrap="square" lIns="72390" tIns="36195" rIns="72390" bIns="36195" numCol="1" spcCol="1270" anchor="ctr" anchorCtr="0">
+        <a:bodyPr spcFirstLastPara="0" vert="horz" wrap="square" lIns="60960" tIns="30480" rIns="60960" bIns="30480" numCol="1" spcCol="1270" anchor="ctr" anchorCtr="0">
           <a:noAutofit/>
         </a:bodyPr>
         <a:lstStyle/>
         <a:p>
-          <a:pPr marL="0" lvl="0" indent="0" algn="ctr" defTabSz="844550">
+          <a:pPr marL="0" lvl="0" indent="0" algn="ctr" defTabSz="711200">
             <a:lnSpc>
               <a:spcPct val="90000"/>
             </a:lnSpc>
@@ -13046,25 +13271,25 @@
             <a:buNone/>
           </a:pPr>
           <a:r>
-            <a:rPr lang="en-US" sz="1900" kern="1200" dirty="0"/>
-            <a:t>9</a:t>
+            <a:rPr lang="en-US" sz="1600" kern="1200" dirty="0"/>
+            <a:t>11</a:t>
           </a:r>
         </a:p>
       </dsp:txBody>
       <dsp:txXfrm>
-        <a:off x="18462" y="416626"/>
-        <a:ext cx="3748692" cy="341268"/>
+        <a:off x="15610" y="352636"/>
+        <a:ext cx="3754396" cy="288543"/>
       </dsp:txXfrm>
     </dsp:sp>
-    <dsp:sp modelId="{6AB1550E-C385-4718-AB89-FF17CF59F285}">
+    <dsp:sp modelId="{252247C1-1B56-4D8C-87FB-B27098B6AD39}">
       <dsp:nvSpPr>
         <dsp:cNvPr id="0" name=""/>
         <dsp:cNvSpPr/>
       </dsp:nvSpPr>
       <dsp:spPr>
         <a:xfrm rot="5400000">
-          <a:off x="6999331" y="-2380629"/>
-          <a:ext cx="302553" cy="6729984"/>
+          <a:off x="7022702" y="-2532331"/>
+          <a:ext cx="255811" cy="6729984"/>
         </a:xfrm>
         <a:prstGeom prst="round2SameRect">
           <a:avLst/>
@@ -13108,12 +13333,12 @@
         <a:fontRef idx="minor"/>
       </dsp:style>
       <dsp:txBody>
-        <a:bodyPr spcFirstLastPara="0" vert="horz" wrap="square" lIns="57150" tIns="28575" rIns="57150" bIns="28575" numCol="1" spcCol="1270" anchor="ctr" anchorCtr="0">
+        <a:bodyPr spcFirstLastPara="0" vert="horz" wrap="square" lIns="45720" tIns="22860" rIns="45720" bIns="22860" numCol="1" spcCol="1270" anchor="ctr" anchorCtr="0">
           <a:noAutofit/>
         </a:bodyPr>
         <a:lstStyle/>
         <a:p>
-          <a:pPr marL="114300" lvl="1" indent="-114300" algn="l" defTabSz="666750">
+          <a:pPr marL="114300" lvl="1" indent="-114300" algn="l" defTabSz="533400">
             <a:lnSpc>
               <a:spcPct val="90000"/>
             </a:lnSpc>
@@ -13126,25 +13351,26 @@
             <a:buChar char="•"/>
           </a:pPr>
           <a:r>
-            <a:rPr lang="en-US" sz="1500" kern="1200" dirty="0"/>
+            <a:rPr lang="en-US" sz="1200" kern="1200"/>
             <a:t>Top Z position A647</a:t>
           </a:r>
+          <a:endParaRPr lang="en-US" sz="1200" kern="1200" dirty="0"/>
         </a:p>
       </dsp:txBody>
       <dsp:txXfrm rot="-5400000">
-        <a:off x="3785616" y="847855"/>
-        <a:ext cx="6715215" cy="273015"/>
+        <a:off x="3785616" y="717243"/>
+        <a:ext cx="6717496" cy="230835"/>
       </dsp:txXfrm>
     </dsp:sp>
-    <dsp:sp modelId="{7ED2616D-3965-4CD9-BF4D-6CDCBBA52BAC}">
+    <dsp:sp modelId="{F12FCF34-9E88-4F3C-B75C-BD6AE8E40F6E}">
       <dsp:nvSpPr>
         <dsp:cNvPr id="0" name=""/>
         <dsp:cNvSpPr/>
       </dsp:nvSpPr>
       <dsp:spPr>
         <a:xfrm>
-          <a:off x="0" y="795266"/>
-          <a:ext cx="3785616" cy="378192"/>
+          <a:off x="0" y="672778"/>
+          <a:ext cx="3785616" cy="319763"/>
         </a:xfrm>
         <a:prstGeom prst="roundRect">
           <a:avLst/>
@@ -13186,12 +13412,12 @@
         </a:fontRef>
       </dsp:style>
       <dsp:txBody>
-        <a:bodyPr spcFirstLastPara="0" vert="horz" wrap="square" lIns="72390" tIns="36195" rIns="72390" bIns="36195" numCol="1" spcCol="1270" anchor="ctr" anchorCtr="0">
+        <a:bodyPr spcFirstLastPara="0" vert="horz" wrap="square" lIns="60960" tIns="30480" rIns="60960" bIns="30480" numCol="1" spcCol="1270" anchor="ctr" anchorCtr="0">
           <a:noAutofit/>
         </a:bodyPr>
         <a:lstStyle/>
         <a:p>
-          <a:pPr marL="0" lvl="0" indent="0" algn="ctr" defTabSz="844550">
+          <a:pPr marL="0" lvl="0" indent="0" algn="ctr" defTabSz="711200">
             <a:lnSpc>
               <a:spcPct val="90000"/>
             </a:lnSpc>
@@ -13204,25 +13430,25 @@
             <a:buNone/>
           </a:pPr>
           <a:r>
-            <a:rPr lang="en-US" sz="1900" kern="1200" dirty="0"/>
-            <a:t>8</a:t>
+            <a:rPr lang="en-US" sz="1600" kern="1200" dirty="0"/>
+            <a:t>10</a:t>
           </a:r>
         </a:p>
       </dsp:txBody>
       <dsp:txXfrm>
-        <a:off x="18462" y="813728"/>
-        <a:ext cx="3748692" cy="341268"/>
+        <a:off x="15610" y="688388"/>
+        <a:ext cx="3754396" cy="288543"/>
       </dsp:txXfrm>
     </dsp:sp>
-    <dsp:sp modelId="{3BEDDF74-E637-43B3-8A8B-DFFFE1BF03F8}">
+    <dsp:sp modelId="{FAABE7F5-1683-464A-B4C4-5F4236F6AD44}">
       <dsp:nvSpPr>
         <dsp:cNvPr id="0" name=""/>
         <dsp:cNvSpPr/>
       </dsp:nvSpPr>
       <dsp:spPr>
         <a:xfrm rot="5400000">
-          <a:off x="6999331" y="-1983527"/>
-          <a:ext cx="302553" cy="6729984"/>
+          <a:off x="7022702" y="-2196579"/>
+          <a:ext cx="255811" cy="6729984"/>
         </a:xfrm>
         <a:prstGeom prst="round2SameRect">
           <a:avLst/>
@@ -13266,12 +13492,12 @@
         <a:fontRef idx="minor"/>
       </dsp:style>
       <dsp:txBody>
-        <a:bodyPr spcFirstLastPara="0" vert="horz" wrap="square" lIns="57150" tIns="28575" rIns="57150" bIns="28575" numCol="1" spcCol="1270" anchor="ctr" anchorCtr="0">
+        <a:bodyPr spcFirstLastPara="0" vert="horz" wrap="square" lIns="45720" tIns="22860" rIns="45720" bIns="22860" numCol="1" spcCol="1270" anchor="ctr" anchorCtr="0">
           <a:noAutofit/>
         </a:bodyPr>
         <a:lstStyle/>
         <a:p>
-          <a:pPr marL="114300" lvl="1" indent="-114300" algn="l" defTabSz="666750">
+          <a:pPr marL="114300" lvl="1" indent="-114300" algn="l" defTabSz="533400">
             <a:lnSpc>
               <a:spcPct val="90000"/>
             </a:lnSpc>
@@ -13284,25 +13510,25 @@
             <a:buChar char="•"/>
           </a:pPr>
           <a:r>
-            <a:rPr lang="en-US" sz="1500" kern="1200" dirty="0"/>
-            <a:t>Number Z slices A555 with depth of focus step sizes</a:t>
+            <a:rPr lang="en-US" sz="1200" kern="1200" dirty="0"/>
+            <a:t>Number Z slices A647 with depth of focus step sizes</a:t>
           </a:r>
         </a:p>
       </dsp:txBody>
       <dsp:txXfrm rot="-5400000">
-        <a:off x="3785616" y="1244957"/>
-        <a:ext cx="6715215" cy="273015"/>
+        <a:off x="3785616" y="1052995"/>
+        <a:ext cx="6717496" cy="230835"/>
       </dsp:txXfrm>
     </dsp:sp>
-    <dsp:sp modelId="{D50219D7-709A-4BEC-B02B-FACFFE1B4F1E}">
+    <dsp:sp modelId="{E47B67E0-569F-4426-9055-20FCEA9BC8D2}">
       <dsp:nvSpPr>
         <dsp:cNvPr id="0" name=""/>
         <dsp:cNvSpPr/>
       </dsp:nvSpPr>
       <dsp:spPr>
         <a:xfrm>
-          <a:off x="0" y="1192368"/>
-          <a:ext cx="3785616" cy="378192"/>
+          <a:off x="0" y="1008530"/>
+          <a:ext cx="3785616" cy="319763"/>
         </a:xfrm>
         <a:prstGeom prst="roundRect">
           <a:avLst/>
@@ -13344,12 +13570,12 @@
         </a:fontRef>
       </dsp:style>
       <dsp:txBody>
-        <a:bodyPr spcFirstLastPara="0" vert="horz" wrap="square" lIns="72390" tIns="36195" rIns="72390" bIns="36195" numCol="1" spcCol="1270" anchor="ctr" anchorCtr="0">
+        <a:bodyPr spcFirstLastPara="0" vert="horz" wrap="square" lIns="60960" tIns="30480" rIns="60960" bIns="30480" numCol="1" spcCol="1270" anchor="ctr" anchorCtr="0">
           <a:noAutofit/>
         </a:bodyPr>
         <a:lstStyle/>
         <a:p>
-          <a:pPr marL="0" lvl="0" indent="0" algn="ctr" defTabSz="844550">
+          <a:pPr marL="0" lvl="0" indent="0" algn="ctr" defTabSz="711200">
             <a:lnSpc>
               <a:spcPct val="90000"/>
             </a:lnSpc>
@@ -13362,25 +13588,25 @@
             <a:buNone/>
           </a:pPr>
           <a:r>
-            <a:rPr lang="en-US" sz="1900" kern="1200" dirty="0"/>
-            <a:t>7</a:t>
+            <a:rPr lang="en-US" sz="1600" kern="1200" dirty="0"/>
+            <a:t>9</a:t>
           </a:r>
         </a:p>
       </dsp:txBody>
       <dsp:txXfrm>
-        <a:off x="18462" y="1210830"/>
-        <a:ext cx="3748692" cy="341268"/>
+        <a:off x="15610" y="1024140"/>
+        <a:ext cx="3754396" cy="288543"/>
       </dsp:txXfrm>
     </dsp:sp>
-    <dsp:sp modelId="{8D19A966-B752-413D-884D-47C9FC61B37F}">
+    <dsp:sp modelId="{6AB1550E-C385-4718-AB89-FF17CF59F285}">
       <dsp:nvSpPr>
         <dsp:cNvPr id="0" name=""/>
         <dsp:cNvSpPr/>
       </dsp:nvSpPr>
       <dsp:spPr>
         <a:xfrm rot="5400000">
-          <a:off x="6999331" y="-1586425"/>
-          <a:ext cx="302553" cy="6729984"/>
+          <a:off x="7022702" y="-1860827"/>
+          <a:ext cx="255811" cy="6729984"/>
         </a:xfrm>
         <a:prstGeom prst="round2SameRect">
           <a:avLst/>
@@ -13424,12 +13650,12 @@
         <a:fontRef idx="minor"/>
       </dsp:style>
       <dsp:txBody>
-        <a:bodyPr spcFirstLastPara="0" vert="horz" wrap="square" lIns="57150" tIns="28575" rIns="57150" bIns="28575" numCol="1" spcCol="1270" anchor="ctr" anchorCtr="0">
+        <a:bodyPr spcFirstLastPara="0" vert="horz" wrap="square" lIns="45720" tIns="22860" rIns="45720" bIns="22860" numCol="1" spcCol="1270" anchor="ctr" anchorCtr="0">
           <a:noAutofit/>
         </a:bodyPr>
         <a:lstStyle/>
         <a:p>
-          <a:pPr marL="114300" lvl="1" indent="-114300" algn="l" defTabSz="666750">
+          <a:pPr marL="114300" lvl="1" indent="-114300" algn="l" defTabSz="533400">
             <a:lnSpc>
               <a:spcPct val="90000"/>
             </a:lnSpc>
@@ -13442,25 +13668,25 @@
             <a:buChar char="•"/>
           </a:pPr>
           <a:r>
-            <a:rPr lang="en-US" sz="1500" kern="1200" dirty="0"/>
-            <a:t>Top Z position A555</a:t>
+            <a:rPr lang="en-US" sz="1200" kern="1200" dirty="0"/>
+            <a:t>Top Z position A647</a:t>
           </a:r>
         </a:p>
       </dsp:txBody>
       <dsp:txXfrm rot="-5400000">
-        <a:off x="3785616" y="1642059"/>
-        <a:ext cx="6715215" cy="273015"/>
+        <a:off x="3785616" y="1388747"/>
+        <a:ext cx="6717496" cy="230835"/>
       </dsp:txXfrm>
     </dsp:sp>
-    <dsp:sp modelId="{0AE97034-2EEA-4546-B6E1-4FED6E26618F}">
+    <dsp:sp modelId="{7ED2616D-3965-4CD9-BF4D-6CDCBBA52BAC}">
       <dsp:nvSpPr>
         <dsp:cNvPr id="0" name=""/>
         <dsp:cNvSpPr/>
       </dsp:nvSpPr>
       <dsp:spPr>
         <a:xfrm>
-          <a:off x="0" y="1589470"/>
-          <a:ext cx="3785616" cy="378192"/>
+          <a:off x="0" y="1344282"/>
+          <a:ext cx="3785616" cy="319763"/>
         </a:xfrm>
         <a:prstGeom prst="roundRect">
           <a:avLst/>
@@ -13502,12 +13728,12 @@
         </a:fontRef>
       </dsp:style>
       <dsp:txBody>
-        <a:bodyPr spcFirstLastPara="0" vert="horz" wrap="square" lIns="72390" tIns="36195" rIns="72390" bIns="36195" numCol="1" spcCol="1270" anchor="ctr" anchorCtr="0">
+        <a:bodyPr spcFirstLastPara="0" vert="horz" wrap="square" lIns="60960" tIns="30480" rIns="60960" bIns="30480" numCol="1" spcCol="1270" anchor="ctr" anchorCtr="0">
           <a:noAutofit/>
         </a:bodyPr>
         <a:lstStyle/>
         <a:p>
-          <a:pPr marL="0" lvl="0" indent="0" algn="ctr" defTabSz="844550">
+          <a:pPr marL="0" lvl="0" indent="0" algn="ctr" defTabSz="711200">
             <a:lnSpc>
               <a:spcPct val="90000"/>
             </a:lnSpc>
@@ -13520,25 +13746,25 @@
             <a:buNone/>
           </a:pPr>
           <a:r>
-            <a:rPr lang="en-US" sz="1900" kern="1200" dirty="0"/>
-            <a:t>6</a:t>
+            <a:rPr lang="en-US" sz="1600" kern="1200" dirty="0"/>
+            <a:t>8</a:t>
           </a:r>
         </a:p>
       </dsp:txBody>
       <dsp:txXfrm>
-        <a:off x="18462" y="1607932"/>
-        <a:ext cx="3748692" cy="341268"/>
+        <a:off x="15610" y="1359892"/>
+        <a:ext cx="3754396" cy="288543"/>
       </dsp:txXfrm>
     </dsp:sp>
-    <dsp:sp modelId="{6CDEE012-C9C5-4A17-838B-A6C32B86F9FD}">
+    <dsp:sp modelId="{3BEDDF74-E637-43B3-8A8B-DFFFE1BF03F8}">
       <dsp:nvSpPr>
         <dsp:cNvPr id="0" name=""/>
         <dsp:cNvSpPr/>
       </dsp:nvSpPr>
       <dsp:spPr>
         <a:xfrm rot="5400000">
-          <a:off x="6999331" y="-1189322"/>
-          <a:ext cx="302553" cy="6729984"/>
+          <a:off x="7022702" y="-1525075"/>
+          <a:ext cx="255811" cy="6729984"/>
         </a:xfrm>
         <a:prstGeom prst="round2SameRect">
           <a:avLst/>
@@ -13582,12 +13808,12 @@
         <a:fontRef idx="minor"/>
       </dsp:style>
       <dsp:txBody>
-        <a:bodyPr spcFirstLastPara="0" vert="horz" wrap="square" lIns="57150" tIns="28575" rIns="57150" bIns="28575" numCol="1" spcCol="1270" anchor="ctr" anchorCtr="0">
+        <a:bodyPr spcFirstLastPara="0" vert="horz" wrap="square" lIns="45720" tIns="22860" rIns="45720" bIns="22860" numCol="1" spcCol="1270" anchor="ctr" anchorCtr="0">
           <a:noAutofit/>
         </a:bodyPr>
         <a:lstStyle/>
         <a:p>
-          <a:pPr marL="114300" lvl="1" indent="-114300" algn="l" defTabSz="666750">
+          <a:pPr marL="114300" lvl="1" indent="-114300" algn="l" defTabSz="533400">
             <a:lnSpc>
               <a:spcPct val="90000"/>
             </a:lnSpc>
@@ -13600,25 +13826,25 @@
             <a:buChar char="•"/>
           </a:pPr>
           <a:r>
-            <a:rPr lang="en-US" sz="1500" kern="1200" dirty="0"/>
-            <a:t>Number Z slices A488 with depth of focus step sizes</a:t>
+            <a:rPr lang="en-US" sz="1200" kern="1200" dirty="0"/>
+            <a:t>Number Z slices A555 with depth of focus step sizes</a:t>
           </a:r>
         </a:p>
       </dsp:txBody>
       <dsp:txXfrm rot="-5400000">
-        <a:off x="3785616" y="2039162"/>
-        <a:ext cx="6715215" cy="273015"/>
+        <a:off x="3785616" y="1724499"/>
+        <a:ext cx="6717496" cy="230835"/>
       </dsp:txXfrm>
     </dsp:sp>
-    <dsp:sp modelId="{420DC76F-67CB-4E7F-B46E-2E6148ED358C}">
+    <dsp:sp modelId="{D50219D7-709A-4BEC-B02B-FACFFE1B4F1E}">
       <dsp:nvSpPr>
         <dsp:cNvPr id="0" name=""/>
         <dsp:cNvSpPr/>
       </dsp:nvSpPr>
       <dsp:spPr>
         <a:xfrm>
-          <a:off x="0" y="1986572"/>
-          <a:ext cx="3785616" cy="378192"/>
+          <a:off x="0" y="1680035"/>
+          <a:ext cx="3785616" cy="319763"/>
         </a:xfrm>
         <a:prstGeom prst="roundRect">
           <a:avLst/>
@@ -13660,12 +13886,12 @@
         </a:fontRef>
       </dsp:style>
       <dsp:txBody>
-        <a:bodyPr spcFirstLastPara="0" vert="horz" wrap="square" lIns="72390" tIns="36195" rIns="72390" bIns="36195" numCol="1" spcCol="1270" anchor="ctr" anchorCtr="0">
+        <a:bodyPr spcFirstLastPara="0" vert="horz" wrap="square" lIns="60960" tIns="30480" rIns="60960" bIns="30480" numCol="1" spcCol="1270" anchor="ctr" anchorCtr="0">
           <a:noAutofit/>
         </a:bodyPr>
         <a:lstStyle/>
         <a:p>
-          <a:pPr marL="0" lvl="0" indent="0" algn="ctr" defTabSz="844550">
+          <a:pPr marL="0" lvl="0" indent="0" algn="ctr" defTabSz="711200">
             <a:lnSpc>
               <a:spcPct val="90000"/>
             </a:lnSpc>
@@ -13678,25 +13904,25 @@
             <a:buNone/>
           </a:pPr>
           <a:r>
-            <a:rPr lang="en-US" sz="1900" kern="1200" dirty="0"/>
-            <a:t>5</a:t>
+            <a:rPr lang="en-US" sz="1600" kern="1200" dirty="0"/>
+            <a:t>7</a:t>
           </a:r>
         </a:p>
       </dsp:txBody>
       <dsp:txXfrm>
-        <a:off x="18462" y="2005034"/>
-        <a:ext cx="3748692" cy="341268"/>
+        <a:off x="15610" y="1695645"/>
+        <a:ext cx="3754396" cy="288543"/>
       </dsp:txXfrm>
     </dsp:sp>
-    <dsp:sp modelId="{11A37157-747C-4EF9-86E3-7060FDB3EDCF}">
+    <dsp:sp modelId="{8D19A966-B752-413D-884D-47C9FC61B37F}">
       <dsp:nvSpPr>
         <dsp:cNvPr id="0" name=""/>
         <dsp:cNvSpPr/>
       </dsp:nvSpPr>
       <dsp:spPr>
         <a:xfrm rot="5400000">
-          <a:off x="6999331" y="-792220"/>
-          <a:ext cx="302553" cy="6729984"/>
+          <a:off x="7022702" y="-1189323"/>
+          <a:ext cx="255811" cy="6729984"/>
         </a:xfrm>
         <a:prstGeom prst="round2SameRect">
           <a:avLst/>
@@ -13740,12 +13966,12 @@
         <a:fontRef idx="minor"/>
       </dsp:style>
       <dsp:txBody>
-        <a:bodyPr spcFirstLastPara="0" vert="horz" wrap="square" lIns="57150" tIns="28575" rIns="57150" bIns="28575" numCol="1" spcCol="1270" anchor="ctr" anchorCtr="0">
+        <a:bodyPr spcFirstLastPara="0" vert="horz" wrap="square" lIns="45720" tIns="22860" rIns="45720" bIns="22860" numCol="1" spcCol="1270" anchor="ctr" anchorCtr="0">
           <a:noAutofit/>
         </a:bodyPr>
         <a:lstStyle/>
         <a:p>
-          <a:pPr marL="114300" lvl="1" indent="-114300" algn="l" defTabSz="666750">
+          <a:pPr marL="114300" lvl="1" indent="-114300" algn="l" defTabSz="533400">
             <a:lnSpc>
               <a:spcPct val="90000"/>
             </a:lnSpc>
@@ -13758,25 +13984,25 @@
             <a:buChar char="•"/>
           </a:pPr>
           <a:r>
-            <a:rPr lang="en-US" sz="1500" kern="1200" dirty="0"/>
-            <a:t>Top Z position A488</a:t>
+            <a:rPr lang="en-US" sz="1200" kern="1200" dirty="0"/>
+            <a:t>Top Z position A555</a:t>
           </a:r>
         </a:p>
       </dsp:txBody>
       <dsp:txXfrm rot="-5400000">
-        <a:off x="3785616" y="2436264"/>
-        <a:ext cx="6715215" cy="273015"/>
+        <a:off x="3785616" y="2060251"/>
+        <a:ext cx="6717496" cy="230835"/>
       </dsp:txXfrm>
     </dsp:sp>
-    <dsp:sp modelId="{37DDD804-7468-4745-86EB-0ADFEB1882A6}">
+    <dsp:sp modelId="{0AE97034-2EEA-4546-B6E1-4FED6E26618F}">
       <dsp:nvSpPr>
         <dsp:cNvPr id="0" name=""/>
         <dsp:cNvSpPr/>
       </dsp:nvSpPr>
       <dsp:spPr>
         <a:xfrm>
-          <a:off x="0" y="2383674"/>
-          <a:ext cx="3785616" cy="378192"/>
+          <a:off x="0" y="2015787"/>
+          <a:ext cx="3785616" cy="319763"/>
         </a:xfrm>
         <a:prstGeom prst="roundRect">
           <a:avLst/>
@@ -13818,12 +14044,12 @@
         </a:fontRef>
       </dsp:style>
       <dsp:txBody>
-        <a:bodyPr spcFirstLastPara="0" vert="horz" wrap="square" lIns="72390" tIns="36195" rIns="72390" bIns="36195" numCol="1" spcCol="1270" anchor="ctr" anchorCtr="0">
+        <a:bodyPr spcFirstLastPara="0" vert="horz" wrap="square" lIns="60960" tIns="30480" rIns="60960" bIns="30480" numCol="1" spcCol="1270" anchor="ctr" anchorCtr="0">
           <a:noAutofit/>
         </a:bodyPr>
         <a:lstStyle/>
         <a:p>
-          <a:pPr marL="0" lvl="0" indent="0" algn="ctr" defTabSz="844550">
+          <a:pPr marL="0" lvl="0" indent="0" algn="ctr" defTabSz="711200">
             <a:lnSpc>
               <a:spcPct val="90000"/>
             </a:lnSpc>
@@ -13836,25 +14062,25 @@
             <a:buNone/>
           </a:pPr>
           <a:r>
-            <a:rPr lang="en-US" sz="1900" kern="1200" dirty="0"/>
-            <a:t>4</a:t>
+            <a:rPr lang="en-US" sz="1600" kern="1200" dirty="0"/>
+            <a:t>6</a:t>
           </a:r>
         </a:p>
       </dsp:txBody>
       <dsp:txXfrm>
-        <a:off x="18462" y="2402136"/>
-        <a:ext cx="3748692" cy="341268"/>
+        <a:off x="15610" y="2031397"/>
+        <a:ext cx="3754396" cy="288543"/>
       </dsp:txXfrm>
     </dsp:sp>
-    <dsp:sp modelId="{70E40ED8-44BE-430D-B675-928F3AAF69F6}">
+    <dsp:sp modelId="{6CDEE012-C9C5-4A17-838B-A6C32B86F9FD}">
       <dsp:nvSpPr>
         <dsp:cNvPr id="0" name=""/>
         <dsp:cNvSpPr/>
       </dsp:nvSpPr>
       <dsp:spPr>
         <a:xfrm rot="5400000">
-          <a:off x="6999331" y="-395118"/>
-          <a:ext cx="302553" cy="6729984"/>
+          <a:off x="7022702" y="-853570"/>
+          <a:ext cx="255811" cy="6729984"/>
         </a:xfrm>
         <a:prstGeom prst="round2SameRect">
           <a:avLst/>
@@ -13898,12 +14124,12 @@
         <a:fontRef idx="minor"/>
       </dsp:style>
       <dsp:txBody>
-        <a:bodyPr spcFirstLastPara="0" vert="horz" wrap="square" lIns="57150" tIns="28575" rIns="57150" bIns="28575" numCol="1" spcCol="1270" anchor="ctr" anchorCtr="0">
+        <a:bodyPr spcFirstLastPara="0" vert="horz" wrap="square" lIns="45720" tIns="22860" rIns="45720" bIns="22860" numCol="1" spcCol="1270" anchor="ctr" anchorCtr="0">
           <a:noAutofit/>
         </a:bodyPr>
         <a:lstStyle/>
         <a:p>
-          <a:pPr marL="114300" lvl="1" indent="-114300" algn="l" defTabSz="666750">
+          <a:pPr marL="114300" lvl="1" indent="-114300" algn="l" defTabSz="533400">
             <a:lnSpc>
               <a:spcPct val="90000"/>
             </a:lnSpc>
@@ -13916,25 +14142,25 @@
             <a:buChar char="•"/>
           </a:pPr>
           <a:r>
-            <a:rPr lang="en-US" sz="1500" kern="1200" dirty="0"/>
-            <a:t>Number Z slices DAPI with depth of focus step sizes</a:t>
+            <a:rPr lang="en-US" sz="1200" kern="1200" dirty="0"/>
+            <a:t>Number Z slices A488 with depth of focus step sizes</a:t>
           </a:r>
         </a:p>
       </dsp:txBody>
       <dsp:txXfrm rot="-5400000">
-        <a:off x="3785616" y="2833366"/>
-        <a:ext cx="6715215" cy="273015"/>
+        <a:off x="3785616" y="2396004"/>
+        <a:ext cx="6717496" cy="230835"/>
       </dsp:txXfrm>
     </dsp:sp>
-    <dsp:sp modelId="{15B1535D-7A2F-4187-BF40-F7B12325C164}">
+    <dsp:sp modelId="{420DC76F-67CB-4E7F-B46E-2E6148ED358C}">
       <dsp:nvSpPr>
         <dsp:cNvPr id="0" name=""/>
         <dsp:cNvSpPr/>
       </dsp:nvSpPr>
       <dsp:spPr>
         <a:xfrm>
-          <a:off x="0" y="2780776"/>
-          <a:ext cx="3785616" cy="378192"/>
+          <a:off x="0" y="2351539"/>
+          <a:ext cx="3785616" cy="319763"/>
         </a:xfrm>
         <a:prstGeom prst="roundRect">
           <a:avLst/>
@@ -13976,12 +14202,12 @@
         </a:fontRef>
       </dsp:style>
       <dsp:txBody>
-        <a:bodyPr spcFirstLastPara="0" vert="horz" wrap="square" lIns="72390" tIns="36195" rIns="72390" bIns="36195" numCol="1" spcCol="1270" anchor="ctr" anchorCtr="0">
+        <a:bodyPr spcFirstLastPara="0" vert="horz" wrap="square" lIns="60960" tIns="30480" rIns="60960" bIns="30480" numCol="1" spcCol="1270" anchor="ctr" anchorCtr="0">
           <a:noAutofit/>
         </a:bodyPr>
         <a:lstStyle/>
         <a:p>
-          <a:pPr marL="0" lvl="0" indent="0" algn="ctr" defTabSz="844550">
+          <a:pPr marL="0" lvl="0" indent="0" algn="ctr" defTabSz="711200">
             <a:lnSpc>
               <a:spcPct val="90000"/>
             </a:lnSpc>
@@ -13994,25 +14220,25 @@
             <a:buNone/>
           </a:pPr>
           <a:r>
-            <a:rPr lang="en-US" sz="1900" kern="1200" dirty="0"/>
-            <a:t>3</a:t>
+            <a:rPr lang="en-US" sz="1600" kern="1200" dirty="0"/>
+            <a:t>5</a:t>
           </a:r>
         </a:p>
       </dsp:txBody>
       <dsp:txXfrm>
-        <a:off x="18462" y="2799238"/>
-        <a:ext cx="3748692" cy="341268"/>
+        <a:off x="15610" y="2367149"/>
+        <a:ext cx="3754396" cy="288543"/>
       </dsp:txXfrm>
     </dsp:sp>
-    <dsp:sp modelId="{A66FD841-E172-4F54-A46D-4FEB62724531}">
+    <dsp:sp modelId="{11A37157-747C-4EF9-86E3-7060FDB3EDCF}">
       <dsp:nvSpPr>
         <dsp:cNvPr id="0" name=""/>
         <dsp:cNvSpPr/>
       </dsp:nvSpPr>
       <dsp:spPr>
         <a:xfrm rot="5400000">
-          <a:off x="6999331" y="1983"/>
-          <a:ext cx="302553" cy="6729984"/>
+          <a:off x="7022702" y="-517818"/>
+          <a:ext cx="255811" cy="6729984"/>
         </a:xfrm>
         <a:prstGeom prst="round2SameRect">
           <a:avLst/>
@@ -14056,12 +14282,12 @@
         <a:fontRef idx="minor"/>
       </dsp:style>
       <dsp:txBody>
-        <a:bodyPr spcFirstLastPara="0" vert="horz" wrap="square" lIns="57150" tIns="28575" rIns="57150" bIns="28575" numCol="1" spcCol="1270" anchor="ctr" anchorCtr="0">
+        <a:bodyPr spcFirstLastPara="0" vert="horz" wrap="square" lIns="45720" tIns="22860" rIns="45720" bIns="22860" numCol="1" spcCol="1270" anchor="ctr" anchorCtr="0">
           <a:noAutofit/>
         </a:bodyPr>
         <a:lstStyle/>
         <a:p>
-          <a:pPr marL="114300" lvl="1" indent="-114300" algn="l" defTabSz="666750">
+          <a:pPr marL="114300" lvl="1" indent="-114300" algn="l" defTabSz="533400">
             <a:lnSpc>
               <a:spcPct val="90000"/>
             </a:lnSpc>
@@ -14074,25 +14300,25 @@
             <a:buChar char="•"/>
           </a:pPr>
           <a:r>
-            <a:rPr lang="en-US" sz="1500" kern="1200" dirty="0"/>
-            <a:t>Top Z position DAPI</a:t>
+            <a:rPr lang="en-US" sz="1200" kern="1200" dirty="0"/>
+            <a:t>Top Z position A488</a:t>
           </a:r>
         </a:p>
       </dsp:txBody>
       <dsp:txXfrm rot="-5400000">
-        <a:off x="3785616" y="3230468"/>
-        <a:ext cx="6715215" cy="273015"/>
+        <a:off x="3785616" y="2731756"/>
+        <a:ext cx="6717496" cy="230835"/>
       </dsp:txXfrm>
     </dsp:sp>
-    <dsp:sp modelId="{1DD2327A-0023-43BD-AE1D-76839AC91220}">
+    <dsp:sp modelId="{37DDD804-7468-4745-86EB-0ADFEB1882A6}">
       <dsp:nvSpPr>
         <dsp:cNvPr id="0" name=""/>
         <dsp:cNvSpPr/>
       </dsp:nvSpPr>
       <dsp:spPr>
         <a:xfrm>
-          <a:off x="0" y="3177879"/>
-          <a:ext cx="3785616" cy="378192"/>
+          <a:off x="0" y="2687291"/>
+          <a:ext cx="3785616" cy="319763"/>
         </a:xfrm>
         <a:prstGeom prst="roundRect">
           <a:avLst/>
@@ -14134,12 +14360,12 @@
         </a:fontRef>
       </dsp:style>
       <dsp:txBody>
-        <a:bodyPr spcFirstLastPara="0" vert="horz" wrap="square" lIns="72390" tIns="36195" rIns="72390" bIns="36195" numCol="1" spcCol="1270" anchor="ctr" anchorCtr="0">
+        <a:bodyPr spcFirstLastPara="0" vert="horz" wrap="square" lIns="60960" tIns="30480" rIns="60960" bIns="30480" numCol="1" spcCol="1270" anchor="ctr" anchorCtr="0">
           <a:noAutofit/>
         </a:bodyPr>
         <a:lstStyle/>
         <a:p>
-          <a:pPr marL="0" lvl="0" indent="0" algn="ctr" defTabSz="844550">
+          <a:pPr marL="0" lvl="0" indent="0" algn="ctr" defTabSz="711200">
             <a:lnSpc>
               <a:spcPct val="90000"/>
             </a:lnSpc>
@@ -14152,25 +14378,25 @@
             <a:buNone/>
           </a:pPr>
           <a:r>
-            <a:rPr lang="en-US" sz="1900" kern="1200" dirty="0"/>
-            <a:t>2</a:t>
+            <a:rPr lang="en-US" sz="1600" kern="1200" dirty="0"/>
+            <a:t>4</a:t>
           </a:r>
         </a:p>
       </dsp:txBody>
       <dsp:txXfrm>
-        <a:off x="18462" y="3196341"/>
-        <a:ext cx="3748692" cy="341268"/>
+        <a:off x="15610" y="2702901"/>
+        <a:ext cx="3754396" cy="288543"/>
       </dsp:txXfrm>
     </dsp:sp>
-    <dsp:sp modelId="{584C82D3-8114-4ECC-ACD2-0C383433147E}">
+    <dsp:sp modelId="{70E40ED8-44BE-430D-B675-928F3AAF69F6}">
       <dsp:nvSpPr>
         <dsp:cNvPr id="0" name=""/>
         <dsp:cNvSpPr/>
       </dsp:nvSpPr>
       <dsp:spPr>
         <a:xfrm rot="5400000">
-          <a:off x="6999331" y="399085"/>
-          <a:ext cx="302553" cy="6729984"/>
+          <a:off x="7022702" y="-182066"/>
+          <a:ext cx="255811" cy="6729984"/>
         </a:xfrm>
         <a:prstGeom prst="round2SameRect">
           <a:avLst/>
@@ -14214,12 +14440,12 @@
         <a:fontRef idx="minor"/>
       </dsp:style>
       <dsp:txBody>
-        <a:bodyPr spcFirstLastPara="0" vert="horz" wrap="square" lIns="57150" tIns="28575" rIns="57150" bIns="28575" numCol="1" spcCol="1270" anchor="ctr" anchorCtr="0">
+        <a:bodyPr spcFirstLastPara="0" vert="horz" wrap="square" lIns="45720" tIns="22860" rIns="45720" bIns="22860" numCol="1" spcCol="1270" anchor="ctr" anchorCtr="0">
           <a:noAutofit/>
         </a:bodyPr>
         <a:lstStyle/>
         <a:p>
-          <a:pPr marL="114300" lvl="1" indent="-114300" algn="l" defTabSz="666750">
+          <a:pPr marL="114300" lvl="1" indent="-114300" algn="l" defTabSz="533400">
             <a:lnSpc>
               <a:spcPct val="90000"/>
             </a:lnSpc>
@@ -14232,25 +14458,25 @@
             <a:buChar char="•"/>
           </a:pPr>
           <a:r>
-            <a:rPr lang="en-US" sz="1500" kern="1200" dirty="0"/>
-            <a:t>Y positions</a:t>
+            <a:rPr lang="en-US" sz="1200" kern="1200" dirty="0"/>
+            <a:t>Number Z slices DAPI with depth of focus step sizes</a:t>
           </a:r>
         </a:p>
       </dsp:txBody>
       <dsp:txXfrm rot="-5400000">
-        <a:off x="3785616" y="3627570"/>
-        <a:ext cx="6715215" cy="273015"/>
+        <a:off x="3785616" y="3067508"/>
+        <a:ext cx="6717496" cy="230835"/>
       </dsp:txXfrm>
     </dsp:sp>
-    <dsp:sp modelId="{34510324-D802-4FC9-9901-97AFD6953F67}">
+    <dsp:sp modelId="{15B1535D-7A2F-4187-BF40-F7B12325C164}">
       <dsp:nvSpPr>
         <dsp:cNvPr id="0" name=""/>
         <dsp:cNvSpPr/>
       </dsp:nvSpPr>
       <dsp:spPr>
         <a:xfrm>
-          <a:off x="0" y="3574981"/>
-          <a:ext cx="3785616" cy="378192"/>
+          <a:off x="0" y="3023043"/>
+          <a:ext cx="3785616" cy="319763"/>
         </a:xfrm>
         <a:prstGeom prst="roundRect">
           <a:avLst/>
@@ -14292,12 +14518,12 @@
         </a:fontRef>
       </dsp:style>
       <dsp:txBody>
-        <a:bodyPr spcFirstLastPara="0" vert="horz" wrap="square" lIns="72390" tIns="36195" rIns="72390" bIns="36195" numCol="1" spcCol="1270" anchor="ctr" anchorCtr="0">
+        <a:bodyPr spcFirstLastPara="0" vert="horz" wrap="square" lIns="60960" tIns="30480" rIns="60960" bIns="30480" numCol="1" spcCol="1270" anchor="ctr" anchorCtr="0">
           <a:noAutofit/>
         </a:bodyPr>
         <a:lstStyle/>
         <a:p>
-          <a:pPr marL="0" lvl="0" indent="0" algn="ctr" defTabSz="844550">
+          <a:pPr marL="0" lvl="0" indent="0" algn="ctr" defTabSz="711200">
             <a:lnSpc>
               <a:spcPct val="90000"/>
             </a:lnSpc>
@@ -14310,25 +14536,25 @@
             <a:buNone/>
           </a:pPr>
           <a:r>
-            <a:rPr lang="en-US" sz="1900" kern="1200" dirty="0"/>
-            <a:t>1</a:t>
+            <a:rPr lang="en-US" sz="1600" kern="1200" dirty="0"/>
+            <a:t>3</a:t>
           </a:r>
         </a:p>
       </dsp:txBody>
       <dsp:txXfrm>
-        <a:off x="18462" y="3593443"/>
-        <a:ext cx="3748692" cy="341268"/>
+        <a:off x="15610" y="3038653"/>
+        <a:ext cx="3754396" cy="288543"/>
       </dsp:txXfrm>
     </dsp:sp>
-    <dsp:sp modelId="{A16281FF-B68A-4B29-9589-85A8639DAE3B}">
+    <dsp:sp modelId="{A66FD841-E172-4F54-A46D-4FEB62724531}">
       <dsp:nvSpPr>
         <dsp:cNvPr id="0" name=""/>
         <dsp:cNvSpPr/>
       </dsp:nvSpPr>
       <dsp:spPr>
         <a:xfrm rot="5400000">
-          <a:off x="6999331" y="796187"/>
-          <a:ext cx="302553" cy="6729984"/>
+          <a:off x="7022702" y="153685"/>
+          <a:ext cx="255811" cy="6729984"/>
         </a:xfrm>
         <a:prstGeom prst="round2SameRect">
           <a:avLst/>
@@ -14372,12 +14598,12 @@
         <a:fontRef idx="minor"/>
       </dsp:style>
       <dsp:txBody>
-        <a:bodyPr spcFirstLastPara="0" vert="horz" wrap="square" lIns="57150" tIns="28575" rIns="57150" bIns="28575" numCol="1" spcCol="1270" anchor="ctr" anchorCtr="0">
+        <a:bodyPr spcFirstLastPara="0" vert="horz" wrap="square" lIns="45720" tIns="22860" rIns="45720" bIns="22860" numCol="1" spcCol="1270" anchor="ctr" anchorCtr="0">
           <a:noAutofit/>
         </a:bodyPr>
         <a:lstStyle/>
         <a:p>
-          <a:pPr marL="114300" lvl="1" indent="-114300" algn="l" defTabSz="666750">
+          <a:pPr marL="114300" lvl="1" indent="-114300" algn="l" defTabSz="533400">
             <a:lnSpc>
               <a:spcPct val="90000"/>
             </a:lnSpc>
@@ -14390,25 +14616,25 @@
             <a:buChar char="•"/>
           </a:pPr>
           <a:r>
-            <a:rPr lang="en-US" sz="1500" kern="1200" dirty="0"/>
-            <a:t>X positions</a:t>
+            <a:rPr lang="en-US" sz="1200" kern="1200" dirty="0"/>
+            <a:t>Top Z position DAPI</a:t>
           </a:r>
         </a:p>
       </dsp:txBody>
       <dsp:txXfrm rot="-5400000">
-        <a:off x="3785616" y="4024672"/>
-        <a:ext cx="6715215" cy="273015"/>
+        <a:off x="3785616" y="3403259"/>
+        <a:ext cx="6717496" cy="230835"/>
       </dsp:txXfrm>
     </dsp:sp>
-    <dsp:sp modelId="{6A499025-F9DF-477C-8373-2FD3C48E42CD}">
+    <dsp:sp modelId="{1DD2327A-0023-43BD-AE1D-76839AC91220}">
       <dsp:nvSpPr>
         <dsp:cNvPr id="0" name=""/>
         <dsp:cNvSpPr/>
       </dsp:nvSpPr>
       <dsp:spPr>
         <a:xfrm>
-          <a:off x="0" y="3972083"/>
-          <a:ext cx="3785616" cy="378192"/>
+          <a:off x="0" y="3358795"/>
+          <a:ext cx="3785616" cy="319763"/>
         </a:xfrm>
         <a:prstGeom prst="roundRect">
           <a:avLst/>
@@ -14450,12 +14676,12 @@
         </a:fontRef>
       </dsp:style>
       <dsp:txBody>
-        <a:bodyPr spcFirstLastPara="0" vert="horz" wrap="square" lIns="72390" tIns="36195" rIns="72390" bIns="36195" numCol="1" spcCol="1270" anchor="ctr" anchorCtr="0">
+        <a:bodyPr spcFirstLastPara="0" vert="horz" wrap="square" lIns="60960" tIns="30480" rIns="60960" bIns="30480" numCol="1" spcCol="1270" anchor="ctr" anchorCtr="0">
           <a:noAutofit/>
         </a:bodyPr>
         <a:lstStyle/>
         <a:p>
-          <a:pPr marL="0" lvl="0" indent="0" algn="ctr" defTabSz="844550">
+          <a:pPr marL="0" lvl="0" indent="0" algn="ctr" defTabSz="711200">
             <a:lnSpc>
               <a:spcPct val="90000"/>
             </a:lnSpc>
@@ -14468,14 +14694,330 @@
             <a:buNone/>
           </a:pPr>
           <a:r>
-            <a:rPr lang="en-US" sz="1900" kern="1200" dirty="0"/>
+            <a:rPr lang="en-US" sz="1600" kern="1200" dirty="0"/>
+            <a:t>2</a:t>
+          </a:r>
+        </a:p>
+      </dsp:txBody>
+      <dsp:txXfrm>
+        <a:off x="15610" y="3374405"/>
+        <a:ext cx="3754396" cy="288543"/>
+      </dsp:txXfrm>
+    </dsp:sp>
+    <dsp:sp modelId="{584C82D3-8114-4ECC-ACD2-0C383433147E}">
+      <dsp:nvSpPr>
+        <dsp:cNvPr id="0" name=""/>
+        <dsp:cNvSpPr/>
+      </dsp:nvSpPr>
+      <dsp:spPr>
+        <a:xfrm rot="5400000">
+          <a:off x="7022702" y="489437"/>
+          <a:ext cx="255811" cy="6729984"/>
+        </a:xfrm>
+        <a:prstGeom prst="round2SameRect">
+          <a:avLst/>
+        </a:prstGeom>
+        <a:solidFill>
+          <a:schemeClr val="accent1">
+            <a:alpha val="90000"/>
+            <a:tint val="40000"/>
+            <a:hueOff val="0"/>
+            <a:satOff val="0"/>
+            <a:lumOff val="0"/>
+            <a:alphaOff val="0"/>
+          </a:schemeClr>
+        </a:solidFill>
+        <a:ln w="12700" cap="flat" cmpd="sng" algn="ctr">
+          <a:solidFill>
+            <a:schemeClr val="accent1">
+              <a:alpha val="90000"/>
+              <a:tint val="40000"/>
+              <a:hueOff val="0"/>
+              <a:satOff val="0"/>
+              <a:lumOff val="0"/>
+              <a:alphaOff val="0"/>
+            </a:schemeClr>
+          </a:solidFill>
+          <a:prstDash val="solid"/>
+          <a:miter lim="800000"/>
+        </a:ln>
+        <a:effectLst/>
+      </dsp:spPr>
+      <dsp:style>
+        <a:lnRef idx="2">
+          <a:scrgbClr r="0" g="0" b="0"/>
+        </a:lnRef>
+        <a:fillRef idx="1">
+          <a:scrgbClr r="0" g="0" b="0"/>
+        </a:fillRef>
+        <a:effectRef idx="0">
+          <a:scrgbClr r="0" g="0" b="0"/>
+        </a:effectRef>
+        <a:fontRef idx="minor"/>
+      </dsp:style>
+      <dsp:txBody>
+        <a:bodyPr spcFirstLastPara="0" vert="horz" wrap="square" lIns="45720" tIns="22860" rIns="45720" bIns="22860" numCol="1" spcCol="1270" anchor="ctr" anchorCtr="0">
+          <a:noAutofit/>
+        </a:bodyPr>
+        <a:lstStyle/>
+        <a:p>
+          <a:pPr marL="114300" lvl="1" indent="-114300" algn="l" defTabSz="533400">
+            <a:lnSpc>
+              <a:spcPct val="90000"/>
+            </a:lnSpc>
+            <a:spcBef>
+              <a:spcPct val="0"/>
+            </a:spcBef>
+            <a:spcAft>
+              <a:spcPct val="15000"/>
+            </a:spcAft>
+            <a:buChar char="•"/>
+          </a:pPr>
+          <a:r>
+            <a:rPr lang="en-US" sz="1200" kern="1200" dirty="0"/>
+            <a:t>Y positions</a:t>
+          </a:r>
+        </a:p>
+      </dsp:txBody>
+      <dsp:txXfrm rot="-5400000">
+        <a:off x="3785616" y="3739011"/>
+        <a:ext cx="6717496" cy="230835"/>
+      </dsp:txXfrm>
+    </dsp:sp>
+    <dsp:sp modelId="{34510324-D802-4FC9-9901-97AFD6953F67}">
+      <dsp:nvSpPr>
+        <dsp:cNvPr id="0" name=""/>
+        <dsp:cNvSpPr/>
+      </dsp:nvSpPr>
+      <dsp:spPr>
+        <a:xfrm>
+          <a:off x="0" y="3694547"/>
+          <a:ext cx="3785616" cy="319763"/>
+        </a:xfrm>
+        <a:prstGeom prst="roundRect">
+          <a:avLst/>
+        </a:prstGeom>
+        <a:solidFill>
+          <a:schemeClr val="accent1">
+            <a:hueOff val="0"/>
+            <a:satOff val="0"/>
+            <a:lumOff val="0"/>
+            <a:alphaOff val="0"/>
+          </a:schemeClr>
+        </a:solidFill>
+        <a:ln w="12700" cap="flat" cmpd="sng" algn="ctr">
+          <a:solidFill>
+            <a:schemeClr val="lt1">
+              <a:hueOff val="0"/>
+              <a:satOff val="0"/>
+              <a:lumOff val="0"/>
+              <a:alphaOff val="0"/>
+            </a:schemeClr>
+          </a:solidFill>
+          <a:prstDash val="solid"/>
+          <a:miter lim="800000"/>
+        </a:ln>
+        <a:effectLst/>
+      </dsp:spPr>
+      <dsp:style>
+        <a:lnRef idx="2">
+          <a:scrgbClr r="0" g="0" b="0"/>
+        </a:lnRef>
+        <a:fillRef idx="1">
+          <a:scrgbClr r="0" g="0" b="0"/>
+        </a:fillRef>
+        <a:effectRef idx="0">
+          <a:scrgbClr r="0" g="0" b="0"/>
+        </a:effectRef>
+        <a:fontRef idx="minor">
+          <a:schemeClr val="lt1"/>
+        </a:fontRef>
+      </dsp:style>
+      <dsp:txBody>
+        <a:bodyPr spcFirstLastPara="0" vert="horz" wrap="square" lIns="60960" tIns="30480" rIns="60960" bIns="30480" numCol="1" spcCol="1270" anchor="ctr" anchorCtr="0">
+          <a:noAutofit/>
+        </a:bodyPr>
+        <a:lstStyle/>
+        <a:p>
+          <a:pPr marL="0" lvl="0" indent="0" algn="ctr" defTabSz="711200">
+            <a:lnSpc>
+              <a:spcPct val="90000"/>
+            </a:lnSpc>
+            <a:spcBef>
+              <a:spcPct val="0"/>
+            </a:spcBef>
+            <a:spcAft>
+              <a:spcPct val="35000"/>
+            </a:spcAft>
+            <a:buNone/>
+          </a:pPr>
+          <a:r>
+            <a:rPr lang="en-US" sz="1600" kern="1200" dirty="0"/>
+            <a:t>1</a:t>
+          </a:r>
+        </a:p>
+      </dsp:txBody>
+      <dsp:txXfrm>
+        <a:off x="15610" y="3710157"/>
+        <a:ext cx="3754396" cy="288543"/>
+      </dsp:txXfrm>
+    </dsp:sp>
+    <dsp:sp modelId="{A16281FF-B68A-4B29-9589-85A8639DAE3B}">
+      <dsp:nvSpPr>
+        <dsp:cNvPr id="0" name=""/>
+        <dsp:cNvSpPr/>
+      </dsp:nvSpPr>
+      <dsp:spPr>
+        <a:xfrm rot="5400000">
+          <a:off x="7022702" y="825189"/>
+          <a:ext cx="255811" cy="6729984"/>
+        </a:xfrm>
+        <a:prstGeom prst="round2SameRect">
+          <a:avLst/>
+        </a:prstGeom>
+        <a:solidFill>
+          <a:schemeClr val="accent1">
+            <a:alpha val="90000"/>
+            <a:tint val="40000"/>
+            <a:hueOff val="0"/>
+            <a:satOff val="0"/>
+            <a:lumOff val="0"/>
+            <a:alphaOff val="0"/>
+          </a:schemeClr>
+        </a:solidFill>
+        <a:ln w="12700" cap="flat" cmpd="sng" algn="ctr">
+          <a:solidFill>
+            <a:schemeClr val="accent1">
+              <a:alpha val="90000"/>
+              <a:tint val="40000"/>
+              <a:hueOff val="0"/>
+              <a:satOff val="0"/>
+              <a:lumOff val="0"/>
+              <a:alphaOff val="0"/>
+            </a:schemeClr>
+          </a:solidFill>
+          <a:prstDash val="solid"/>
+          <a:miter lim="800000"/>
+        </a:ln>
+        <a:effectLst/>
+      </dsp:spPr>
+      <dsp:style>
+        <a:lnRef idx="2">
+          <a:scrgbClr r="0" g="0" b="0"/>
+        </a:lnRef>
+        <a:fillRef idx="1">
+          <a:scrgbClr r="0" g="0" b="0"/>
+        </a:fillRef>
+        <a:effectRef idx="0">
+          <a:scrgbClr r="0" g="0" b="0"/>
+        </a:effectRef>
+        <a:fontRef idx="minor"/>
+      </dsp:style>
+      <dsp:txBody>
+        <a:bodyPr spcFirstLastPara="0" vert="horz" wrap="square" lIns="45720" tIns="22860" rIns="45720" bIns="22860" numCol="1" spcCol="1270" anchor="ctr" anchorCtr="0">
+          <a:noAutofit/>
+        </a:bodyPr>
+        <a:lstStyle/>
+        <a:p>
+          <a:pPr marL="114300" lvl="1" indent="-114300" algn="l" defTabSz="533400">
+            <a:lnSpc>
+              <a:spcPct val="90000"/>
+            </a:lnSpc>
+            <a:spcBef>
+              <a:spcPct val="0"/>
+            </a:spcBef>
+            <a:spcAft>
+              <a:spcPct val="15000"/>
+            </a:spcAft>
+            <a:buChar char="•"/>
+          </a:pPr>
+          <a:r>
+            <a:rPr lang="en-US" sz="1200" kern="1200" dirty="0"/>
+            <a:t>X positions</a:t>
+          </a:r>
+        </a:p>
+      </dsp:txBody>
+      <dsp:txXfrm rot="-5400000">
+        <a:off x="3785616" y="4074763"/>
+        <a:ext cx="6717496" cy="230835"/>
+      </dsp:txXfrm>
+    </dsp:sp>
+    <dsp:sp modelId="{6A499025-F9DF-477C-8373-2FD3C48E42CD}">
+      <dsp:nvSpPr>
+        <dsp:cNvPr id="0" name=""/>
+        <dsp:cNvSpPr/>
+      </dsp:nvSpPr>
+      <dsp:spPr>
+        <a:xfrm>
+          <a:off x="0" y="4030299"/>
+          <a:ext cx="3785616" cy="319763"/>
+        </a:xfrm>
+        <a:prstGeom prst="roundRect">
+          <a:avLst/>
+        </a:prstGeom>
+        <a:solidFill>
+          <a:schemeClr val="accent1">
+            <a:hueOff val="0"/>
+            <a:satOff val="0"/>
+            <a:lumOff val="0"/>
+            <a:alphaOff val="0"/>
+          </a:schemeClr>
+        </a:solidFill>
+        <a:ln w="12700" cap="flat" cmpd="sng" algn="ctr">
+          <a:solidFill>
+            <a:schemeClr val="lt1">
+              <a:hueOff val="0"/>
+              <a:satOff val="0"/>
+              <a:lumOff val="0"/>
+              <a:alphaOff val="0"/>
+            </a:schemeClr>
+          </a:solidFill>
+          <a:prstDash val="solid"/>
+          <a:miter lim="800000"/>
+        </a:ln>
+        <a:effectLst/>
+      </dsp:spPr>
+      <dsp:style>
+        <a:lnRef idx="2">
+          <a:scrgbClr r="0" g="0" b="0"/>
+        </a:lnRef>
+        <a:fillRef idx="1">
+          <a:scrgbClr r="0" g="0" b="0"/>
+        </a:fillRef>
+        <a:effectRef idx="0">
+          <a:scrgbClr r="0" g="0" b="0"/>
+        </a:effectRef>
+        <a:fontRef idx="minor">
+          <a:schemeClr val="lt1"/>
+        </a:fontRef>
+      </dsp:style>
+      <dsp:txBody>
+        <a:bodyPr spcFirstLastPara="0" vert="horz" wrap="square" lIns="60960" tIns="30480" rIns="60960" bIns="30480" numCol="1" spcCol="1270" anchor="ctr" anchorCtr="0">
+          <a:noAutofit/>
+        </a:bodyPr>
+        <a:lstStyle/>
+        <a:p>
+          <a:pPr marL="0" lvl="0" indent="0" algn="ctr" defTabSz="711200">
+            <a:lnSpc>
+              <a:spcPct val="90000"/>
+            </a:lnSpc>
+            <a:spcBef>
+              <a:spcPct val="0"/>
+            </a:spcBef>
+            <a:spcAft>
+              <a:spcPct val="35000"/>
+            </a:spcAft>
+            <a:buNone/>
+          </a:pPr>
+          <a:r>
+            <a:rPr lang="en-US" sz="1600" kern="1200" dirty="0"/>
             <a:t>0</a:t>
           </a:r>
         </a:p>
       </dsp:txBody>
       <dsp:txXfrm>
-        <a:off x="18462" y="3990545"/>
-        <a:ext cx="3748692" cy="341268"/>
+        <a:off x="15610" y="4045909"/>
+        <a:ext cx="3754396" cy="288543"/>
       </dsp:txXfrm>
     </dsp:sp>
   </dsp:spTree>
@@ -26989,7 +27531,7 @@
           <a:p>
             <a:fld id="{D1ACE2F4-E882-4A93-B606-CA9C404A6B2F}" type="datetimeFigureOut">
               <a:rPr lang="en-US" smtClean="0"/>
-              <a:t>2/5/2024</a:t>
+              <a:t>10/21/2025</a:t>
             </a:fld>
             <a:endParaRPr lang="en-US"/>
           </a:p>
@@ -27187,7 +27729,7 @@
           <a:p>
             <a:fld id="{D1ACE2F4-E882-4A93-B606-CA9C404A6B2F}" type="datetimeFigureOut">
               <a:rPr lang="en-US" smtClean="0"/>
-              <a:t>2/5/2024</a:t>
+              <a:t>10/21/2025</a:t>
             </a:fld>
             <a:endParaRPr lang="en-US"/>
           </a:p>
@@ -27395,7 +27937,7 @@
           <a:p>
             <a:fld id="{D1ACE2F4-E882-4A93-B606-CA9C404A6B2F}" type="datetimeFigureOut">
               <a:rPr lang="en-US" smtClean="0"/>
-              <a:t>2/5/2024</a:t>
+              <a:t>10/21/2025</a:t>
             </a:fld>
             <a:endParaRPr lang="en-US"/>
           </a:p>
@@ -27593,7 +28135,7 @@
           <a:p>
             <a:fld id="{D1ACE2F4-E882-4A93-B606-CA9C404A6B2F}" type="datetimeFigureOut">
               <a:rPr lang="en-US" smtClean="0"/>
-              <a:t>2/5/2024</a:t>
+              <a:t>10/21/2025</a:t>
             </a:fld>
             <a:endParaRPr lang="en-US"/>
           </a:p>
@@ -27868,7 +28410,7 @@
           <a:p>
             <a:fld id="{D1ACE2F4-E882-4A93-B606-CA9C404A6B2F}" type="datetimeFigureOut">
               <a:rPr lang="en-US" smtClean="0"/>
-              <a:t>2/5/2024</a:t>
+              <a:t>10/21/2025</a:t>
             </a:fld>
             <a:endParaRPr lang="en-US"/>
           </a:p>
@@ -28133,7 +28675,7 @@
           <a:p>
             <a:fld id="{D1ACE2F4-E882-4A93-B606-CA9C404A6B2F}" type="datetimeFigureOut">
               <a:rPr lang="en-US" smtClean="0"/>
-              <a:t>2/5/2024</a:t>
+              <a:t>10/21/2025</a:t>
             </a:fld>
             <a:endParaRPr lang="en-US"/>
           </a:p>
@@ -28545,7 +29087,7 @@
           <a:p>
             <a:fld id="{D1ACE2F4-E882-4A93-B606-CA9C404A6B2F}" type="datetimeFigureOut">
               <a:rPr lang="en-US" smtClean="0"/>
-              <a:t>2/5/2024</a:t>
+              <a:t>10/21/2025</a:t>
             </a:fld>
             <a:endParaRPr lang="en-US"/>
           </a:p>
@@ -28686,7 +29228,7 @@
           <a:p>
             <a:fld id="{D1ACE2F4-E882-4A93-B606-CA9C404A6B2F}" type="datetimeFigureOut">
               <a:rPr lang="en-US" smtClean="0"/>
-              <a:t>2/5/2024</a:t>
+              <a:t>10/21/2025</a:t>
             </a:fld>
             <a:endParaRPr lang="en-US"/>
           </a:p>
@@ -28799,7 +29341,7 @@
           <a:p>
             <a:fld id="{D1ACE2F4-E882-4A93-B606-CA9C404A6B2F}" type="datetimeFigureOut">
               <a:rPr lang="en-US" smtClean="0"/>
-              <a:t>2/5/2024</a:t>
+              <a:t>10/21/2025</a:t>
             </a:fld>
             <a:endParaRPr lang="en-US"/>
           </a:p>
@@ -29110,7 +29652,7 @@
           <a:p>
             <a:fld id="{D1ACE2F4-E882-4A93-B606-CA9C404A6B2F}" type="datetimeFigureOut">
               <a:rPr lang="en-US" smtClean="0"/>
-              <a:t>2/5/2024</a:t>
+              <a:t>10/21/2025</a:t>
             </a:fld>
             <a:endParaRPr lang="en-US"/>
           </a:p>
@@ -29398,7 +29940,7 @@
           <a:p>
             <a:fld id="{D1ACE2F4-E882-4A93-B606-CA9C404A6B2F}" type="datetimeFigureOut">
               <a:rPr lang="en-US" smtClean="0"/>
-              <a:t>2/5/2024</a:t>
+              <a:t>10/21/2025</a:t>
             </a:fld>
             <a:endParaRPr lang="en-US"/>
           </a:p>
@@ -29639,7 +30181,7 @@
           <a:p>
             <a:fld id="{D1ACE2F4-E882-4A93-B606-CA9C404A6B2F}" type="datetimeFigureOut">
               <a:rPr lang="en-US" smtClean="0"/>
-              <a:t>2/5/2024</a:t>
+              <a:t>10/21/2025</a:t>
             </a:fld>
             <a:endParaRPr lang="en-US"/>
           </a:p>
@@ -32392,7 +32934,7 @@
             <p:ph idx="1"/>
             <p:extLst>
               <p:ext uri="{D42A27DB-BD31-4B8C-83A1-F6EECF244321}">
-                <p14:modId xmlns:p14="http://schemas.microsoft.com/office/powerpoint/2010/main" val="4158530399"/>
+                <p14:modId xmlns:p14="http://schemas.microsoft.com/office/powerpoint/2010/main" val="797710023"/>
               </p:ext>
             </p:extLst>
           </p:nvPr>
